--- a/docs/presentation.pptx
+++ b/docs/presentation.pptx
@@ -838,7 +838,7 @@
           <a:lstStyle/>
           <a:p>
             <a:r>
-              <a:t>**Nevia** gives them computers, databases and branches to work on **m2p** (Mongo to Postgres) moves the data, **acc** (application code changer) moves the code You review the evidence, and decide The promise: a migration that is evidence-driven at every step, where the agents do the tedious work on throwaway infrastructure, and a person keeps the decisions (merge, cut over).</a:t>
+              <a:t>The promise: a migration that is evidence-driven at every step, where the agents do the tedious work on throwaway infrastructure, and a person keeps the decisions (merge, cut over).</a:t>
             </a:r>
           </a:p>
         </p:txBody>
@@ -6393,7 +6393,7 @@
         </p:nvSpPr>
         <p:spPr>
           <a:xfrm>
-            <a:off x="6517843" y="429768"/>
+            <a:off x="6217919" y="425196"/>
             <a:ext cx="64008" cy="64008"/>
           </a:xfrm>
           <a:prstGeom prst="ellipse">
@@ -6437,8 +6437,8 @@
         </p:nvSpPr>
         <p:spPr>
           <a:xfrm>
-            <a:off x="6590995" y="384048"/>
-            <a:ext cx="570585" cy="146304"/>
+            <a:off x="6327647" y="384048"/>
+            <a:ext cx="548640" cy="146304"/>
           </a:xfrm>
           <a:prstGeom prst="rect">
             <a:avLst/>
@@ -6446,8 +6446,8 @@
           <a:noFill/>
         </p:spPr>
         <p:txBody>
-          <a:bodyPr wrap="square" lIns="45720" rIns="45720" tIns="18288" bIns="18288" anchor="t">
-            <a:spAutoFit/>
+          <a:bodyPr wrap="none" lIns="0" rIns="0" tIns="0" bIns="0" anchor="ctr">
+            <a:noAutofit/>
           </a:bodyPr>
           <a:lstStyle/>
           <a:p>
@@ -6476,7 +6476,7 @@
         </p:nvSpPr>
         <p:spPr>
           <a:xfrm>
-            <a:off x="7161580" y="429768"/>
+            <a:off x="6986015" y="425196"/>
             <a:ext cx="64008" cy="64008"/>
           </a:xfrm>
           <a:prstGeom prst="ellipse">
@@ -6520,8 +6520,8 @@
         </p:nvSpPr>
         <p:spPr>
           <a:xfrm>
-            <a:off x="7234732" y="384048"/>
-            <a:ext cx="378561" cy="146304"/>
+            <a:off x="7095743" y="384048"/>
+            <a:ext cx="320040" cy="146304"/>
           </a:xfrm>
           <a:prstGeom prst="rect">
             <a:avLst/>
@@ -6529,8 +6529,8 @@
           <a:noFill/>
         </p:spPr>
         <p:txBody>
-          <a:bodyPr wrap="square" lIns="45720" rIns="45720" tIns="18288" bIns="18288" anchor="t">
-            <a:spAutoFit/>
+          <a:bodyPr wrap="none" lIns="0" rIns="0" tIns="0" bIns="0" anchor="ctr">
+            <a:noAutofit/>
           </a:bodyPr>
           <a:lstStyle/>
           <a:p>
@@ -6559,7 +6559,7 @@
         </p:nvSpPr>
         <p:spPr>
           <a:xfrm>
-            <a:off x="7613294" y="429768"/>
+            <a:off x="7525511" y="425196"/>
             <a:ext cx="64008" cy="64008"/>
           </a:xfrm>
           <a:prstGeom prst="ellipse">
@@ -6603,8 +6603,8 @@
         </p:nvSpPr>
         <p:spPr>
           <a:xfrm>
-            <a:off x="7686446" y="384048"/>
-            <a:ext cx="263347" cy="146304"/>
+            <a:off x="7635240" y="384048"/>
+            <a:ext cx="182880" cy="146304"/>
           </a:xfrm>
           <a:prstGeom prst="rect">
             <a:avLst/>
@@ -6612,8 +6612,8 @@
           <a:noFill/>
         </p:spPr>
         <p:txBody>
-          <a:bodyPr wrap="square" lIns="45720" rIns="45720" tIns="18288" bIns="18288" anchor="t">
-            <a:spAutoFit/>
+          <a:bodyPr wrap="none" lIns="0" rIns="0" tIns="0" bIns="0" anchor="ctr">
+            <a:noAutofit/>
           </a:bodyPr>
           <a:lstStyle/>
           <a:p>
@@ -6642,7 +6642,7 @@
         </p:nvSpPr>
         <p:spPr>
           <a:xfrm>
-            <a:off x="7949793" y="429768"/>
+            <a:off x="7927847" y="425196"/>
             <a:ext cx="64008" cy="64008"/>
           </a:xfrm>
           <a:prstGeom prst="ellipse">
@@ -6686,8 +6686,8 @@
         </p:nvSpPr>
         <p:spPr>
           <a:xfrm>
-            <a:off x="8022945" y="384048"/>
-            <a:ext cx="186537" cy="146304"/>
+            <a:off x="8037575" y="384048"/>
+            <a:ext cx="91440" cy="146304"/>
           </a:xfrm>
           <a:prstGeom prst="rect">
             <a:avLst/>
@@ -6695,8 +6695,8 @@
           <a:noFill/>
         </p:spPr>
         <p:txBody>
-          <a:bodyPr wrap="square" lIns="45720" rIns="45720" tIns="18288" bIns="18288" anchor="t">
-            <a:spAutoFit/>
+          <a:bodyPr wrap="none" lIns="0" rIns="0" tIns="0" bIns="0" anchor="ctr">
+            <a:noAutofit/>
           </a:bodyPr>
           <a:lstStyle/>
           <a:p>
@@ -6725,7 +6725,7 @@
         </p:nvSpPr>
         <p:spPr>
           <a:xfrm>
-            <a:off x="8209483" y="429768"/>
+            <a:off x="8238743" y="425196"/>
             <a:ext cx="64008" cy="64008"/>
           </a:xfrm>
           <a:prstGeom prst="ellipse">
@@ -6769,8 +6769,8 @@
         </p:nvSpPr>
         <p:spPr>
           <a:xfrm>
-            <a:off x="8282635" y="384048"/>
-            <a:ext cx="340156" cy="146304"/>
+            <a:off x="8348471" y="384048"/>
+            <a:ext cx="274320" cy="146304"/>
           </a:xfrm>
           <a:prstGeom prst="rect">
             <a:avLst/>
@@ -6778,8 +6778,8 @@
           <a:noFill/>
         </p:spPr>
         <p:txBody>
-          <a:bodyPr wrap="square" lIns="45720" rIns="45720" tIns="18288" bIns="18288" anchor="t">
-            <a:spAutoFit/>
+          <a:bodyPr wrap="none" lIns="0" rIns="0" tIns="0" bIns="0" anchor="ctr">
+            <a:noAutofit/>
           </a:bodyPr>
           <a:lstStyle/>
           <a:p>
@@ -8957,7 +8957,7 @@
         </p:nvSpPr>
         <p:spPr>
           <a:xfrm>
-            <a:off x="6517843" y="429768"/>
+            <a:off x="6217919" y="425196"/>
             <a:ext cx="64008" cy="64008"/>
           </a:xfrm>
           <a:prstGeom prst="ellipse">
@@ -9001,8 +9001,8 @@
         </p:nvSpPr>
         <p:spPr>
           <a:xfrm>
-            <a:off x="6590995" y="384048"/>
-            <a:ext cx="570585" cy="146304"/>
+            <a:off x="6327647" y="384048"/>
+            <a:ext cx="548640" cy="146304"/>
           </a:xfrm>
           <a:prstGeom prst="rect">
             <a:avLst/>
@@ -9010,8 +9010,8 @@
           <a:noFill/>
         </p:spPr>
         <p:txBody>
-          <a:bodyPr wrap="square" lIns="45720" rIns="45720" tIns="18288" bIns="18288" anchor="t">
-            <a:spAutoFit/>
+          <a:bodyPr wrap="none" lIns="0" rIns="0" tIns="0" bIns="0" anchor="ctr">
+            <a:noAutofit/>
           </a:bodyPr>
           <a:lstStyle/>
           <a:p>
@@ -9040,7 +9040,7 @@
         </p:nvSpPr>
         <p:spPr>
           <a:xfrm>
-            <a:off x="7161580" y="429768"/>
+            <a:off x="6986015" y="425196"/>
             <a:ext cx="64008" cy="64008"/>
           </a:xfrm>
           <a:prstGeom prst="ellipse">
@@ -9084,8 +9084,8 @@
         </p:nvSpPr>
         <p:spPr>
           <a:xfrm>
-            <a:off x="7234732" y="384048"/>
-            <a:ext cx="378561" cy="146304"/>
+            <a:off x="7095743" y="384048"/>
+            <a:ext cx="320040" cy="146304"/>
           </a:xfrm>
           <a:prstGeom prst="rect">
             <a:avLst/>
@@ -9093,8 +9093,8 @@
           <a:noFill/>
         </p:spPr>
         <p:txBody>
-          <a:bodyPr wrap="square" lIns="45720" rIns="45720" tIns="18288" bIns="18288" anchor="t">
-            <a:spAutoFit/>
+          <a:bodyPr wrap="none" lIns="0" rIns="0" tIns="0" bIns="0" anchor="ctr">
+            <a:noAutofit/>
           </a:bodyPr>
           <a:lstStyle/>
           <a:p>
@@ -9123,7 +9123,7 @@
         </p:nvSpPr>
         <p:spPr>
           <a:xfrm>
-            <a:off x="7613294" y="429768"/>
+            <a:off x="7525511" y="425196"/>
             <a:ext cx="64008" cy="64008"/>
           </a:xfrm>
           <a:prstGeom prst="ellipse">
@@ -9167,8 +9167,8 @@
         </p:nvSpPr>
         <p:spPr>
           <a:xfrm>
-            <a:off x="7686446" y="384048"/>
-            <a:ext cx="263347" cy="146304"/>
+            <a:off x="7635240" y="384048"/>
+            <a:ext cx="182880" cy="146304"/>
           </a:xfrm>
           <a:prstGeom prst="rect">
             <a:avLst/>
@@ -9176,8 +9176,8 @@
           <a:noFill/>
         </p:spPr>
         <p:txBody>
-          <a:bodyPr wrap="square" lIns="45720" rIns="45720" tIns="18288" bIns="18288" anchor="t">
-            <a:spAutoFit/>
+          <a:bodyPr wrap="none" lIns="0" rIns="0" tIns="0" bIns="0" anchor="ctr">
+            <a:noAutofit/>
           </a:bodyPr>
           <a:lstStyle/>
           <a:p>
@@ -9206,7 +9206,7 @@
         </p:nvSpPr>
         <p:spPr>
           <a:xfrm>
-            <a:off x="7949793" y="429768"/>
+            <a:off x="7927847" y="425196"/>
             <a:ext cx="64008" cy="64008"/>
           </a:xfrm>
           <a:prstGeom prst="ellipse">
@@ -9250,8 +9250,8 @@
         </p:nvSpPr>
         <p:spPr>
           <a:xfrm>
-            <a:off x="8022945" y="384048"/>
-            <a:ext cx="186537" cy="146304"/>
+            <a:off x="8037575" y="384048"/>
+            <a:ext cx="91440" cy="146304"/>
           </a:xfrm>
           <a:prstGeom prst="rect">
             <a:avLst/>
@@ -9259,8 +9259,8 @@
           <a:noFill/>
         </p:spPr>
         <p:txBody>
-          <a:bodyPr wrap="square" lIns="45720" rIns="45720" tIns="18288" bIns="18288" anchor="t">
-            <a:spAutoFit/>
+          <a:bodyPr wrap="none" lIns="0" rIns="0" tIns="0" bIns="0" anchor="ctr">
+            <a:noAutofit/>
           </a:bodyPr>
           <a:lstStyle/>
           <a:p>
@@ -9289,7 +9289,7 @@
         </p:nvSpPr>
         <p:spPr>
           <a:xfrm>
-            <a:off x="8209483" y="429768"/>
+            <a:off x="8238743" y="425196"/>
             <a:ext cx="64008" cy="64008"/>
           </a:xfrm>
           <a:prstGeom prst="ellipse">
@@ -9333,8 +9333,8 @@
         </p:nvSpPr>
         <p:spPr>
           <a:xfrm>
-            <a:off x="8282635" y="384048"/>
-            <a:ext cx="340156" cy="146304"/>
+            <a:off x="8348471" y="384048"/>
+            <a:ext cx="274320" cy="146304"/>
           </a:xfrm>
           <a:prstGeom prst="rect">
             <a:avLst/>
@@ -9342,8 +9342,8 @@
           <a:noFill/>
         </p:spPr>
         <p:txBody>
-          <a:bodyPr wrap="square" lIns="45720" rIns="45720" tIns="18288" bIns="18288" anchor="t">
-            <a:spAutoFit/>
+          <a:bodyPr wrap="none" lIns="0" rIns="0" tIns="0" bIns="0" anchor="ctr">
+            <a:noAutofit/>
           </a:bodyPr>
           <a:lstStyle/>
           <a:p>
@@ -11603,7 +11603,7 @@
         </p:nvSpPr>
         <p:spPr>
           <a:xfrm>
-            <a:off x="6517843" y="429768"/>
+            <a:off x="6217919" y="425196"/>
             <a:ext cx="64008" cy="64008"/>
           </a:xfrm>
           <a:prstGeom prst="ellipse">
@@ -11647,8 +11647,8 @@
         </p:nvSpPr>
         <p:spPr>
           <a:xfrm>
-            <a:off x="6590995" y="384048"/>
-            <a:ext cx="570585" cy="146304"/>
+            <a:off x="6327647" y="384048"/>
+            <a:ext cx="548640" cy="146304"/>
           </a:xfrm>
           <a:prstGeom prst="rect">
             <a:avLst/>
@@ -11656,8 +11656,8 @@
           <a:noFill/>
         </p:spPr>
         <p:txBody>
-          <a:bodyPr wrap="square" lIns="45720" rIns="45720" tIns="18288" bIns="18288" anchor="t">
-            <a:spAutoFit/>
+          <a:bodyPr wrap="none" lIns="0" rIns="0" tIns="0" bIns="0" anchor="ctr">
+            <a:noAutofit/>
           </a:bodyPr>
           <a:lstStyle/>
           <a:p>
@@ -11686,7 +11686,7 @@
         </p:nvSpPr>
         <p:spPr>
           <a:xfrm>
-            <a:off x="7161580" y="429768"/>
+            <a:off x="6986015" y="425196"/>
             <a:ext cx="64008" cy="64008"/>
           </a:xfrm>
           <a:prstGeom prst="ellipse">
@@ -11730,8 +11730,8 @@
         </p:nvSpPr>
         <p:spPr>
           <a:xfrm>
-            <a:off x="7234732" y="384048"/>
-            <a:ext cx="378561" cy="146304"/>
+            <a:off x="7095743" y="384048"/>
+            <a:ext cx="320040" cy="146304"/>
           </a:xfrm>
           <a:prstGeom prst="rect">
             <a:avLst/>
@@ -11739,8 +11739,8 @@
           <a:noFill/>
         </p:spPr>
         <p:txBody>
-          <a:bodyPr wrap="square" lIns="45720" rIns="45720" tIns="18288" bIns="18288" anchor="t">
-            <a:spAutoFit/>
+          <a:bodyPr wrap="none" lIns="0" rIns="0" tIns="0" bIns="0" anchor="ctr">
+            <a:noAutofit/>
           </a:bodyPr>
           <a:lstStyle/>
           <a:p>
@@ -11769,7 +11769,7 @@
         </p:nvSpPr>
         <p:spPr>
           <a:xfrm>
-            <a:off x="7613294" y="429768"/>
+            <a:off x="7525511" y="425196"/>
             <a:ext cx="64008" cy="64008"/>
           </a:xfrm>
           <a:prstGeom prst="ellipse">
@@ -11813,8 +11813,8 @@
         </p:nvSpPr>
         <p:spPr>
           <a:xfrm>
-            <a:off x="7686446" y="384048"/>
-            <a:ext cx="263347" cy="146304"/>
+            <a:off x="7635240" y="384048"/>
+            <a:ext cx="182880" cy="146304"/>
           </a:xfrm>
           <a:prstGeom prst="rect">
             <a:avLst/>
@@ -11822,8 +11822,8 @@
           <a:noFill/>
         </p:spPr>
         <p:txBody>
-          <a:bodyPr wrap="square" lIns="45720" rIns="45720" tIns="18288" bIns="18288" anchor="t">
-            <a:spAutoFit/>
+          <a:bodyPr wrap="none" lIns="0" rIns="0" tIns="0" bIns="0" anchor="ctr">
+            <a:noAutofit/>
           </a:bodyPr>
           <a:lstStyle/>
           <a:p>
@@ -11852,7 +11852,7 @@
         </p:nvSpPr>
         <p:spPr>
           <a:xfrm>
-            <a:off x="7949793" y="429768"/>
+            <a:off x="7927847" y="425196"/>
             <a:ext cx="64008" cy="64008"/>
           </a:xfrm>
           <a:prstGeom prst="ellipse">
@@ -11896,8 +11896,8 @@
         </p:nvSpPr>
         <p:spPr>
           <a:xfrm>
-            <a:off x="8022945" y="384048"/>
-            <a:ext cx="186537" cy="146304"/>
+            <a:off x="8037575" y="384048"/>
+            <a:ext cx="91440" cy="146304"/>
           </a:xfrm>
           <a:prstGeom prst="rect">
             <a:avLst/>
@@ -11905,8 +11905,8 @@
           <a:noFill/>
         </p:spPr>
         <p:txBody>
-          <a:bodyPr wrap="square" lIns="45720" rIns="45720" tIns="18288" bIns="18288" anchor="t">
-            <a:spAutoFit/>
+          <a:bodyPr wrap="none" lIns="0" rIns="0" tIns="0" bIns="0" anchor="ctr">
+            <a:noAutofit/>
           </a:bodyPr>
           <a:lstStyle/>
           <a:p>
@@ -11935,7 +11935,7 @@
         </p:nvSpPr>
         <p:spPr>
           <a:xfrm>
-            <a:off x="8209483" y="429768"/>
+            <a:off x="8238743" y="425196"/>
             <a:ext cx="64008" cy="64008"/>
           </a:xfrm>
           <a:prstGeom prst="ellipse">
@@ -11979,8 +11979,8 @@
         </p:nvSpPr>
         <p:spPr>
           <a:xfrm>
-            <a:off x="8282635" y="384048"/>
-            <a:ext cx="340156" cy="146304"/>
+            <a:off x="8348471" y="384048"/>
+            <a:ext cx="274320" cy="146304"/>
           </a:xfrm>
           <a:prstGeom prst="rect">
             <a:avLst/>
@@ -11988,8 +11988,8 @@
           <a:noFill/>
         </p:spPr>
         <p:txBody>
-          <a:bodyPr wrap="square" lIns="45720" rIns="45720" tIns="18288" bIns="18288" anchor="t">
-            <a:spAutoFit/>
+          <a:bodyPr wrap="none" lIns="0" rIns="0" tIns="0" bIns="0" anchor="ctr">
+            <a:noAutofit/>
           </a:bodyPr>
           <a:lstStyle/>
           <a:p>
@@ -14628,7 +14628,7 @@
         </p:nvSpPr>
         <p:spPr>
           <a:xfrm>
-            <a:off x="6517843" y="429768"/>
+            <a:off x="6217919" y="425196"/>
             <a:ext cx="64008" cy="64008"/>
           </a:xfrm>
           <a:prstGeom prst="ellipse">
@@ -14672,8 +14672,8 @@
         </p:nvSpPr>
         <p:spPr>
           <a:xfrm>
-            <a:off x="6590995" y="384048"/>
-            <a:ext cx="570585" cy="146304"/>
+            <a:off x="6327647" y="384048"/>
+            <a:ext cx="548640" cy="146304"/>
           </a:xfrm>
           <a:prstGeom prst="rect">
             <a:avLst/>
@@ -14681,8 +14681,8 @@
           <a:noFill/>
         </p:spPr>
         <p:txBody>
-          <a:bodyPr wrap="square" lIns="45720" rIns="45720" tIns="18288" bIns="18288" anchor="t">
-            <a:spAutoFit/>
+          <a:bodyPr wrap="none" lIns="0" rIns="0" tIns="0" bIns="0" anchor="ctr">
+            <a:noAutofit/>
           </a:bodyPr>
           <a:lstStyle/>
           <a:p>
@@ -14711,7 +14711,7 @@
         </p:nvSpPr>
         <p:spPr>
           <a:xfrm>
-            <a:off x="7161580" y="429768"/>
+            <a:off x="6986015" y="425196"/>
             <a:ext cx="64008" cy="64008"/>
           </a:xfrm>
           <a:prstGeom prst="ellipse">
@@ -14755,8 +14755,8 @@
         </p:nvSpPr>
         <p:spPr>
           <a:xfrm>
-            <a:off x="7234732" y="384048"/>
-            <a:ext cx="378561" cy="146304"/>
+            <a:off x="7095743" y="384048"/>
+            <a:ext cx="320040" cy="146304"/>
           </a:xfrm>
           <a:prstGeom prst="rect">
             <a:avLst/>
@@ -14764,8 +14764,8 @@
           <a:noFill/>
         </p:spPr>
         <p:txBody>
-          <a:bodyPr wrap="square" lIns="45720" rIns="45720" tIns="18288" bIns="18288" anchor="t">
-            <a:spAutoFit/>
+          <a:bodyPr wrap="none" lIns="0" rIns="0" tIns="0" bIns="0" anchor="ctr">
+            <a:noAutofit/>
           </a:bodyPr>
           <a:lstStyle/>
           <a:p>
@@ -14794,7 +14794,7 @@
         </p:nvSpPr>
         <p:spPr>
           <a:xfrm>
-            <a:off x="7613294" y="429768"/>
+            <a:off x="7525511" y="425196"/>
             <a:ext cx="64008" cy="64008"/>
           </a:xfrm>
           <a:prstGeom prst="ellipse">
@@ -14838,8 +14838,8 @@
         </p:nvSpPr>
         <p:spPr>
           <a:xfrm>
-            <a:off x="7686446" y="384048"/>
-            <a:ext cx="263347" cy="146304"/>
+            <a:off x="7635240" y="384048"/>
+            <a:ext cx="182880" cy="146304"/>
           </a:xfrm>
           <a:prstGeom prst="rect">
             <a:avLst/>
@@ -14847,8 +14847,8 @@
           <a:noFill/>
         </p:spPr>
         <p:txBody>
-          <a:bodyPr wrap="square" lIns="45720" rIns="45720" tIns="18288" bIns="18288" anchor="t">
-            <a:spAutoFit/>
+          <a:bodyPr wrap="none" lIns="0" rIns="0" tIns="0" bIns="0" anchor="ctr">
+            <a:noAutofit/>
           </a:bodyPr>
           <a:lstStyle/>
           <a:p>
@@ -14877,7 +14877,7 @@
         </p:nvSpPr>
         <p:spPr>
           <a:xfrm>
-            <a:off x="7949793" y="429768"/>
+            <a:off x="7927847" y="425196"/>
             <a:ext cx="64008" cy="64008"/>
           </a:xfrm>
           <a:prstGeom prst="ellipse">
@@ -14921,8 +14921,8 @@
         </p:nvSpPr>
         <p:spPr>
           <a:xfrm>
-            <a:off x="8022945" y="384048"/>
-            <a:ext cx="186537" cy="146304"/>
+            <a:off x="8037575" y="384048"/>
+            <a:ext cx="91440" cy="146304"/>
           </a:xfrm>
           <a:prstGeom prst="rect">
             <a:avLst/>
@@ -14930,8 +14930,8 @@
           <a:noFill/>
         </p:spPr>
         <p:txBody>
-          <a:bodyPr wrap="square" lIns="45720" rIns="45720" tIns="18288" bIns="18288" anchor="t">
-            <a:spAutoFit/>
+          <a:bodyPr wrap="none" lIns="0" rIns="0" tIns="0" bIns="0" anchor="ctr">
+            <a:noAutofit/>
           </a:bodyPr>
           <a:lstStyle/>
           <a:p>
@@ -14960,7 +14960,7 @@
         </p:nvSpPr>
         <p:spPr>
           <a:xfrm>
-            <a:off x="8209483" y="429768"/>
+            <a:off x="8238743" y="425196"/>
             <a:ext cx="64008" cy="64008"/>
           </a:xfrm>
           <a:prstGeom prst="ellipse">
@@ -15004,8 +15004,8 @@
         </p:nvSpPr>
         <p:spPr>
           <a:xfrm>
-            <a:off x="8282635" y="384048"/>
-            <a:ext cx="340156" cy="146304"/>
+            <a:off x="8348471" y="384048"/>
+            <a:ext cx="274320" cy="146304"/>
           </a:xfrm>
           <a:prstGeom prst="rect">
             <a:avLst/>
@@ -15013,8 +15013,8 @@
           <a:noFill/>
         </p:spPr>
         <p:txBody>
-          <a:bodyPr wrap="square" lIns="45720" rIns="45720" tIns="18288" bIns="18288" anchor="t">
-            <a:spAutoFit/>
+          <a:bodyPr wrap="none" lIns="0" rIns="0" tIns="0" bIns="0" anchor="ctr">
+            <a:noAutofit/>
           </a:bodyPr>
           <a:lstStyle/>
           <a:p>
@@ -17735,7 +17735,7 @@
         </p:nvSpPr>
         <p:spPr>
           <a:xfrm>
-            <a:off x="6517843" y="429768"/>
+            <a:off x="6217919" y="425196"/>
             <a:ext cx="64008" cy="64008"/>
           </a:xfrm>
           <a:prstGeom prst="ellipse">
@@ -17779,8 +17779,8 @@
         </p:nvSpPr>
         <p:spPr>
           <a:xfrm>
-            <a:off x="6590995" y="384048"/>
-            <a:ext cx="570585" cy="146304"/>
+            <a:off x="6327647" y="384048"/>
+            <a:ext cx="548640" cy="146304"/>
           </a:xfrm>
           <a:prstGeom prst="rect">
             <a:avLst/>
@@ -17788,8 +17788,8 @@
           <a:noFill/>
         </p:spPr>
         <p:txBody>
-          <a:bodyPr wrap="square" lIns="45720" rIns="45720" tIns="18288" bIns="18288" anchor="t">
-            <a:spAutoFit/>
+          <a:bodyPr wrap="none" lIns="0" rIns="0" tIns="0" bIns="0" anchor="ctr">
+            <a:noAutofit/>
           </a:bodyPr>
           <a:lstStyle/>
           <a:p>
@@ -17818,7 +17818,7 @@
         </p:nvSpPr>
         <p:spPr>
           <a:xfrm>
-            <a:off x="7161580" y="429768"/>
+            <a:off x="6986015" y="425196"/>
             <a:ext cx="64008" cy="64008"/>
           </a:xfrm>
           <a:prstGeom prst="ellipse">
@@ -17862,8 +17862,8 @@
         </p:nvSpPr>
         <p:spPr>
           <a:xfrm>
-            <a:off x="7234732" y="384048"/>
-            <a:ext cx="378561" cy="146304"/>
+            <a:off x="7095743" y="384048"/>
+            <a:ext cx="320040" cy="146304"/>
           </a:xfrm>
           <a:prstGeom prst="rect">
             <a:avLst/>
@@ -17871,8 +17871,8 @@
           <a:noFill/>
         </p:spPr>
         <p:txBody>
-          <a:bodyPr wrap="square" lIns="45720" rIns="45720" tIns="18288" bIns="18288" anchor="t">
-            <a:spAutoFit/>
+          <a:bodyPr wrap="none" lIns="0" rIns="0" tIns="0" bIns="0" anchor="ctr">
+            <a:noAutofit/>
           </a:bodyPr>
           <a:lstStyle/>
           <a:p>
@@ -17901,7 +17901,7 @@
         </p:nvSpPr>
         <p:spPr>
           <a:xfrm>
-            <a:off x="7613294" y="429768"/>
+            <a:off x="7525511" y="425196"/>
             <a:ext cx="64008" cy="64008"/>
           </a:xfrm>
           <a:prstGeom prst="ellipse">
@@ -17945,8 +17945,8 @@
         </p:nvSpPr>
         <p:spPr>
           <a:xfrm>
-            <a:off x="7686446" y="384048"/>
-            <a:ext cx="263347" cy="146304"/>
+            <a:off x="7635240" y="384048"/>
+            <a:ext cx="182880" cy="146304"/>
           </a:xfrm>
           <a:prstGeom prst="rect">
             <a:avLst/>
@@ -17954,8 +17954,8 @@
           <a:noFill/>
         </p:spPr>
         <p:txBody>
-          <a:bodyPr wrap="square" lIns="45720" rIns="45720" tIns="18288" bIns="18288" anchor="t">
-            <a:spAutoFit/>
+          <a:bodyPr wrap="none" lIns="0" rIns="0" tIns="0" bIns="0" anchor="ctr">
+            <a:noAutofit/>
           </a:bodyPr>
           <a:lstStyle/>
           <a:p>
@@ -17984,7 +17984,7 @@
         </p:nvSpPr>
         <p:spPr>
           <a:xfrm>
-            <a:off x="7949793" y="429768"/>
+            <a:off x="7927847" y="425196"/>
             <a:ext cx="64008" cy="64008"/>
           </a:xfrm>
           <a:prstGeom prst="ellipse">
@@ -18028,8 +18028,8 @@
         </p:nvSpPr>
         <p:spPr>
           <a:xfrm>
-            <a:off x="8022945" y="384048"/>
-            <a:ext cx="186537" cy="146304"/>
+            <a:off x="8037575" y="384048"/>
+            <a:ext cx="91440" cy="146304"/>
           </a:xfrm>
           <a:prstGeom prst="rect">
             <a:avLst/>
@@ -18037,8 +18037,8 @@
           <a:noFill/>
         </p:spPr>
         <p:txBody>
-          <a:bodyPr wrap="square" lIns="45720" rIns="45720" tIns="18288" bIns="18288" anchor="t">
-            <a:spAutoFit/>
+          <a:bodyPr wrap="none" lIns="0" rIns="0" tIns="0" bIns="0" anchor="ctr">
+            <a:noAutofit/>
           </a:bodyPr>
           <a:lstStyle/>
           <a:p>
@@ -18067,7 +18067,7 @@
         </p:nvSpPr>
         <p:spPr>
           <a:xfrm>
-            <a:off x="8209483" y="429768"/>
+            <a:off x="8238743" y="425196"/>
             <a:ext cx="64008" cy="64008"/>
           </a:xfrm>
           <a:prstGeom prst="ellipse">
@@ -18111,8 +18111,8 @@
         </p:nvSpPr>
         <p:spPr>
           <a:xfrm>
-            <a:off x="8282635" y="384048"/>
-            <a:ext cx="340156" cy="146304"/>
+            <a:off x="8348471" y="384048"/>
+            <a:ext cx="274320" cy="146304"/>
           </a:xfrm>
           <a:prstGeom prst="rect">
             <a:avLst/>
@@ -18120,8 +18120,8 @@
           <a:noFill/>
         </p:spPr>
         <p:txBody>
-          <a:bodyPr wrap="square" lIns="45720" rIns="45720" tIns="18288" bIns="18288" anchor="t">
-            <a:spAutoFit/>
+          <a:bodyPr wrap="none" lIns="0" rIns="0" tIns="0" bIns="0" anchor="ctr">
+            <a:noAutofit/>
           </a:bodyPr>
           <a:lstStyle/>
           <a:p>
@@ -21221,7 +21221,7 @@
         </p:nvSpPr>
         <p:spPr>
           <a:xfrm>
-            <a:off x="6517843" y="429768"/>
+            <a:off x="6217919" y="425196"/>
             <a:ext cx="64008" cy="64008"/>
           </a:xfrm>
           <a:prstGeom prst="ellipse">
@@ -21265,8 +21265,8 @@
         </p:nvSpPr>
         <p:spPr>
           <a:xfrm>
-            <a:off x="6590995" y="384048"/>
-            <a:ext cx="570585" cy="146304"/>
+            <a:off x="6327647" y="384048"/>
+            <a:ext cx="548640" cy="146304"/>
           </a:xfrm>
           <a:prstGeom prst="rect">
             <a:avLst/>
@@ -21274,8 +21274,8 @@
           <a:noFill/>
         </p:spPr>
         <p:txBody>
-          <a:bodyPr wrap="square" lIns="45720" rIns="45720" tIns="18288" bIns="18288" anchor="t">
-            <a:spAutoFit/>
+          <a:bodyPr wrap="none" lIns="0" rIns="0" tIns="0" bIns="0" anchor="ctr">
+            <a:noAutofit/>
           </a:bodyPr>
           <a:lstStyle/>
           <a:p>
@@ -21304,7 +21304,7 @@
         </p:nvSpPr>
         <p:spPr>
           <a:xfrm>
-            <a:off x="7161580" y="429768"/>
+            <a:off x="6986015" y="425196"/>
             <a:ext cx="64008" cy="64008"/>
           </a:xfrm>
           <a:prstGeom prst="ellipse">
@@ -21348,8 +21348,8 @@
         </p:nvSpPr>
         <p:spPr>
           <a:xfrm>
-            <a:off x="7234732" y="384048"/>
-            <a:ext cx="378561" cy="146304"/>
+            <a:off x="7095743" y="384048"/>
+            <a:ext cx="320040" cy="146304"/>
           </a:xfrm>
           <a:prstGeom prst="rect">
             <a:avLst/>
@@ -21357,8 +21357,8 @@
           <a:noFill/>
         </p:spPr>
         <p:txBody>
-          <a:bodyPr wrap="square" lIns="45720" rIns="45720" tIns="18288" bIns="18288" anchor="t">
-            <a:spAutoFit/>
+          <a:bodyPr wrap="none" lIns="0" rIns="0" tIns="0" bIns="0" anchor="ctr">
+            <a:noAutofit/>
           </a:bodyPr>
           <a:lstStyle/>
           <a:p>
@@ -21387,7 +21387,7 @@
         </p:nvSpPr>
         <p:spPr>
           <a:xfrm>
-            <a:off x="7613294" y="429768"/>
+            <a:off x="7525511" y="425196"/>
             <a:ext cx="64008" cy="64008"/>
           </a:xfrm>
           <a:prstGeom prst="ellipse">
@@ -21431,8 +21431,8 @@
         </p:nvSpPr>
         <p:spPr>
           <a:xfrm>
-            <a:off x="7686446" y="384048"/>
-            <a:ext cx="263347" cy="146304"/>
+            <a:off x="7635240" y="384048"/>
+            <a:ext cx="182880" cy="146304"/>
           </a:xfrm>
           <a:prstGeom prst="rect">
             <a:avLst/>
@@ -21440,8 +21440,8 @@
           <a:noFill/>
         </p:spPr>
         <p:txBody>
-          <a:bodyPr wrap="square" lIns="45720" rIns="45720" tIns="18288" bIns="18288" anchor="t">
-            <a:spAutoFit/>
+          <a:bodyPr wrap="none" lIns="0" rIns="0" tIns="0" bIns="0" anchor="ctr">
+            <a:noAutofit/>
           </a:bodyPr>
           <a:lstStyle/>
           <a:p>
@@ -21470,7 +21470,7 @@
         </p:nvSpPr>
         <p:spPr>
           <a:xfrm>
-            <a:off x="7949793" y="429768"/>
+            <a:off x="7927847" y="425196"/>
             <a:ext cx="64008" cy="64008"/>
           </a:xfrm>
           <a:prstGeom prst="ellipse">
@@ -21514,8 +21514,8 @@
         </p:nvSpPr>
         <p:spPr>
           <a:xfrm>
-            <a:off x="8022945" y="384048"/>
-            <a:ext cx="186537" cy="146304"/>
+            <a:off x="8037575" y="384048"/>
+            <a:ext cx="91440" cy="146304"/>
           </a:xfrm>
           <a:prstGeom prst="rect">
             <a:avLst/>
@@ -21523,8 +21523,8 @@
           <a:noFill/>
         </p:spPr>
         <p:txBody>
-          <a:bodyPr wrap="square" lIns="45720" rIns="45720" tIns="18288" bIns="18288" anchor="t">
-            <a:spAutoFit/>
+          <a:bodyPr wrap="none" lIns="0" rIns="0" tIns="0" bIns="0" anchor="ctr">
+            <a:noAutofit/>
           </a:bodyPr>
           <a:lstStyle/>
           <a:p>
@@ -21553,7 +21553,7 @@
         </p:nvSpPr>
         <p:spPr>
           <a:xfrm>
-            <a:off x="8209483" y="429768"/>
+            <a:off x="8238743" y="425196"/>
             <a:ext cx="64008" cy="64008"/>
           </a:xfrm>
           <a:prstGeom prst="ellipse">
@@ -21597,8 +21597,8 @@
         </p:nvSpPr>
         <p:spPr>
           <a:xfrm>
-            <a:off x="8282635" y="384048"/>
-            <a:ext cx="340156" cy="146304"/>
+            <a:off x="8348471" y="384048"/>
+            <a:ext cx="274320" cy="146304"/>
           </a:xfrm>
           <a:prstGeom prst="rect">
             <a:avLst/>
@@ -21606,8 +21606,8 @@
           <a:noFill/>
         </p:spPr>
         <p:txBody>
-          <a:bodyPr wrap="square" lIns="45720" rIns="45720" tIns="18288" bIns="18288" anchor="t">
-            <a:spAutoFit/>
+          <a:bodyPr wrap="none" lIns="0" rIns="0" tIns="0" bIns="0" anchor="ctr">
+            <a:noAutofit/>
           </a:bodyPr>
           <a:lstStyle/>
           <a:p>
@@ -24979,19 +24979,65 @@
             <p:ph type="body" idx="1"/>
           </p:nvPr>
         </p:nvSpPr>
-        <p:spPr/>
-        <p:txBody>
-          <a:bodyPr wrap="square"/>
+        <p:spPr>
+          <a:xfrm>
+            <a:off x="548640" y="1188720"/>
+            <a:ext cx="8055864" cy="3474720"/>
+          </a:xfrm>
+        </p:spPr>
+        <p:txBody>
+          <a:bodyPr wrap="square" anchor="ctr" tIns="0" bIns="0"/>
           <a:lstStyle/>
           <a:p>
             <a:pPr marL="0" indent="0">
+              <a:spcAft>
+                <a:spcPts val="1508"/>
+              </a:spcAft>
               <a:buNone/>
+              <a:spcBef>
+                <a:spcPts val="0"/>
+              </a:spcBef>
+            </a:pPr>
+            <a:r>
+              <a:rPr sz="2000">
+                <a:solidFill>
+                  <a:srgbClr val="5FFA74"/>
+                </a:solidFill>
+                <a:latin typeface="Inter"/>
+              </a:rPr>
+              <a:t>▸  </a:t>
+            </a:r>
+            <a:r>
+              <a:rPr sz="2000" b="1">
+                <a:solidFill>
+                  <a:srgbClr val="FFFFFF"/>
+                </a:solidFill>
+                <a:latin typeface="Inter"/>
+              </a:rPr>
+              <a:t>acc</a:t>
+            </a:r>
+            <a:r>
+              <a:rPr sz="2000" b="0">
+                <a:solidFill>
+                  <a:srgbClr val="FFFFFF"/>
+                </a:solidFill>
+                <a:latin typeface="Inter"/>
+              </a:rPr>
+              <a:t>: an AI agent that changes the app's code</a:t>
+            </a:r>
+          </a:p>
+          <a:p>
+            <a:pPr marL="0" indent="0">
               <a:spcAft>
-                <a:spcPts val="900"/>
+                <a:spcPts val="1508"/>
               </a:spcAft>
+              <a:buNone/>
+              <a:spcBef>
+                <a:spcPts val="0"/>
+              </a:spcBef>
             </a:pPr>
             <a:r>
-              <a:rPr sz="1300">
+              <a:rPr sz="2000">
                 <a:solidFill>
                   <a:srgbClr val="5FFA74"/>
                 </a:solidFill>
@@ -25000,33 +25046,65 @@
               <a:t>▸  </a:t>
             </a:r>
             <a:r>
-              <a:rPr sz="1300" b="1">
+              <a:rPr sz="2000" b="1">
                 <a:solidFill>
                   <a:srgbClr val="FFFFFF"/>
                 </a:solidFill>
                 <a:latin typeface="Inter"/>
               </a:rPr>
-              <a:t>acc, application code changer</a:t>
-            </a:r>
-            <a:r>
-              <a:rPr sz="1300" b="0">
+              <a:t>The AI rewrites the app</a:t>
+            </a:r>
+            <a:r>
+              <a:rPr sz="2000" b="0">
                 <a:solidFill>
                   <a:srgbClr val="FFFFFF"/>
                 </a:solidFill>
                 <a:latin typeface="Inter"/>
               </a:rPr>
-              <a:t>: an AI agent that changes the app's code</a:t>
+              <a:t>: Java code, JDBC, normalized tables ...</a:t>
             </a:r>
           </a:p>
           <a:p>
             <a:pPr marL="0" indent="0">
+              <a:spcAft>
+                <a:spcPts val="1508"/>
+              </a:spcAft>
               <a:buNone/>
+              <a:spcBef>
+                <a:spcPts val="0"/>
+              </a:spcBef>
+            </a:pPr>
+            <a:r>
+              <a:rPr sz="2000">
+                <a:solidFill>
+                  <a:srgbClr val="5FFA74"/>
+                </a:solidFill>
+                <a:latin typeface="Inter"/>
+              </a:rPr>
+              <a:t>▸  </a:t>
+            </a:r>
+            <a:r>
+              <a:rPr sz="2000" b="1">
+                <a:solidFill>
+                  <a:srgbClr val="FFFFFF"/>
+                </a:solidFill>
+                <a:latin typeface="Inter"/>
+              </a:rPr>
+              <a:t>The API stays as it is</a:t>
+            </a:r>
+          </a:p>
+          <a:p>
+            <a:pPr marL="0" indent="0">
               <a:spcAft>
-                <a:spcPts val="900"/>
+                <a:spcPts val="1508"/>
               </a:spcAft>
+              <a:buNone/>
+              <a:spcBef>
+                <a:spcPts val="0"/>
+              </a:spcBef>
             </a:pPr>
             <a:r>
-              <a:rPr sz="1300">
+              <a:rPr sz="2000">
                 <a:solidFill>
                   <a:srgbClr val="5FFA74"/>
                 </a:solidFill>
@@ -25035,33 +25113,74 @@
               <a:t>▸  </a:t>
             </a:r>
             <a:r>
-              <a:rPr sz="1300" b="1">
+              <a:rPr sz="2000" b="1">
                 <a:solidFill>
                   <a:srgbClr val="FFFFFF"/>
                 </a:solidFill>
                 <a:latin typeface="Inter"/>
               </a:rPr>
-              <a:t>The AI rewrites the app</a:t>
-            </a:r>
-            <a:r>
-              <a:rPr sz="1300" b="0">
+              <a:t>The seed data moves too</a:t>
+            </a:r>
+            <a:r>
+              <a:rPr sz="2000" b="0">
                 <a:solidFill>
                   <a:srgbClr val="FFFFFF"/>
                 </a:solidFill>
                 <a:latin typeface="Inter"/>
               </a:rPr>
-              <a:t>: JDBC, normalized tables</a:t>
+              <a:t>, as SQL</a:t>
             </a:r>
           </a:p>
           <a:p>
             <a:pPr marL="0" indent="0">
+              <a:spcAft>
+                <a:spcPts val="1508"/>
+              </a:spcAft>
               <a:buNone/>
+              <a:spcBef>
+                <a:spcPts val="0"/>
+              </a:spcBef>
+            </a:pPr>
+            <a:r>
+              <a:rPr sz="2000">
+                <a:solidFill>
+                  <a:srgbClr val="5FFA74"/>
+                </a:solidFill>
+                <a:latin typeface="Inter"/>
+              </a:rPr>
+              <a:t>▸  </a:t>
+            </a:r>
+            <a:r>
+              <a:rPr sz="2000" b="1">
+                <a:solidFill>
+                  <a:srgbClr val="FFFFFF"/>
+                </a:solidFill>
+                <a:latin typeface="Inter"/>
+              </a:rPr>
+              <a:t>Tested</a:t>
+            </a:r>
+            <a:r>
+              <a:rPr sz="2000" b="0">
+                <a:solidFill>
+                  <a:srgbClr val="FFFFFF"/>
+                </a:solidFill>
+                <a:latin typeface="Inter"/>
+              </a:rPr>
+              <a:t> on a Postgres of its own</a:t>
+            </a:r>
+          </a:p>
+          <a:p>
+            <a:pPr marL="0" indent="0">
               <a:spcAft>
-                <a:spcPts val="900"/>
+                <a:spcPts val="0"/>
               </a:spcAft>
+              <a:buNone/>
+              <a:spcBef>
+                <a:spcPts val="0"/>
+              </a:spcBef>
             </a:pPr>
             <a:r>
-              <a:rPr sz="1300">
+              <a:rPr sz="2000">
                 <a:solidFill>
                   <a:srgbClr val="5FFA74"/>
                 </a:solidFill>
@@ -25070,103 +25189,7 @@
               <a:t>▸  </a:t>
             </a:r>
             <a:r>
-              <a:rPr sz="1300" b="1">
-                <a:solidFill>
-                  <a:srgbClr val="FFFFFF"/>
-                </a:solidFill>
-                <a:latin typeface="Inter"/>
-              </a:rPr>
-              <a:t>The API stays as it is</a:t>
-            </a:r>
-          </a:p>
-          <a:p>
-            <a:pPr marL="0" indent="0">
-              <a:buNone/>
-              <a:spcAft>
-                <a:spcPts val="900"/>
-              </a:spcAft>
-            </a:pPr>
-            <a:r>
-              <a:rPr sz="1300">
-                <a:solidFill>
-                  <a:srgbClr val="5FFA74"/>
-                </a:solidFill>
-                <a:latin typeface="Inter"/>
-              </a:rPr>
-              <a:t>▸  </a:t>
-            </a:r>
-            <a:r>
-              <a:rPr sz="1300" b="1">
-                <a:solidFill>
-                  <a:srgbClr val="FFFFFF"/>
-                </a:solidFill>
-                <a:latin typeface="Inter"/>
-              </a:rPr>
-              <a:t>The seed data moves too</a:t>
-            </a:r>
-            <a:r>
-              <a:rPr sz="1300" b="0">
-                <a:solidFill>
-                  <a:srgbClr val="FFFFFF"/>
-                </a:solidFill>
-                <a:latin typeface="Inter"/>
-              </a:rPr>
-              <a:t>, as SQL</a:t>
-            </a:r>
-          </a:p>
-          <a:p>
-            <a:pPr marL="0" indent="0">
-              <a:buNone/>
-              <a:spcAft>
-                <a:spcPts val="900"/>
-              </a:spcAft>
-            </a:pPr>
-            <a:r>
-              <a:rPr sz="1300">
-                <a:solidFill>
-                  <a:srgbClr val="5FFA74"/>
-                </a:solidFill>
-                <a:latin typeface="Inter"/>
-              </a:rPr>
-              <a:t>▸  </a:t>
-            </a:r>
-            <a:r>
-              <a:rPr sz="1300" b="1">
-                <a:solidFill>
-                  <a:srgbClr val="FFFFFF"/>
-                </a:solidFill>
-                <a:latin typeface="Inter"/>
-              </a:rPr>
-              <a:t>Tested</a:t>
-            </a:r>
-            <a:r>
-              <a:rPr sz="1300" b="0">
-                <a:solidFill>
-                  <a:srgbClr val="FFFFFF"/>
-                </a:solidFill>
-                <a:latin typeface="Inter"/>
-              </a:rPr>
-              <a:t> on a Postgres of its own</a:t>
-            </a:r>
-          </a:p>
-          <a:p>
-            <a:pPr marL="0" indent="0">
-              <a:buNone/>
-              <a:spcAft>
-                <a:spcPts val="900"/>
-              </a:spcAft>
-            </a:pPr>
-            <a:r>
-              <a:rPr sz="1300">
-                <a:solidFill>
-                  <a:srgbClr val="5FFA74"/>
-                </a:solidFill>
-                <a:latin typeface="Inter"/>
-              </a:rPr>
-              <a:t>▸  </a:t>
-            </a:r>
-            <a:r>
-              <a:rPr sz="1300" b="1">
+              <a:rPr sz="2000" b="1">
                 <a:solidFill>
                   <a:srgbClr val="FFFFFF"/>
                 </a:solidFill>
@@ -25235,7 +25258,7 @@
           <a:lstStyle/>
           <a:p>
             <a:r>
-              <a:t>3. Move the code: acc</a:t>
+              <a:t>3. Move the code: application code changer =&gt; acc</a:t>
             </a:r>
           </a:p>
         </p:txBody>
@@ -25329,7 +25352,7 @@
         </p:nvSpPr>
         <p:spPr>
           <a:xfrm>
-            <a:off x="6517843" y="429768"/>
+            <a:off x="6217919" y="425196"/>
             <a:ext cx="64008" cy="64008"/>
           </a:xfrm>
           <a:prstGeom prst="ellipse">
@@ -25373,8 +25396,8 @@
         </p:nvSpPr>
         <p:spPr>
           <a:xfrm>
-            <a:off x="6590995" y="384048"/>
-            <a:ext cx="570585" cy="146304"/>
+            <a:off x="6327647" y="384048"/>
+            <a:ext cx="548640" cy="146304"/>
           </a:xfrm>
           <a:prstGeom prst="rect">
             <a:avLst/>
@@ -25382,8 +25405,8 @@
           <a:noFill/>
         </p:spPr>
         <p:txBody>
-          <a:bodyPr wrap="square" lIns="45720" rIns="45720" tIns="18288" bIns="18288" anchor="t">
-            <a:spAutoFit/>
+          <a:bodyPr wrap="none" lIns="0" rIns="0" tIns="0" bIns="0" anchor="ctr">
+            <a:noAutofit/>
           </a:bodyPr>
           <a:lstStyle/>
           <a:p>
@@ -25412,7 +25435,7 @@
         </p:nvSpPr>
         <p:spPr>
           <a:xfrm>
-            <a:off x="7161580" y="429768"/>
+            <a:off x="6986015" y="425196"/>
             <a:ext cx="64008" cy="64008"/>
           </a:xfrm>
           <a:prstGeom prst="ellipse">
@@ -25456,8 +25479,8 @@
         </p:nvSpPr>
         <p:spPr>
           <a:xfrm>
-            <a:off x="7234732" y="384048"/>
-            <a:ext cx="378561" cy="146304"/>
+            <a:off x="7095743" y="384048"/>
+            <a:ext cx="320040" cy="146304"/>
           </a:xfrm>
           <a:prstGeom prst="rect">
             <a:avLst/>
@@ -25465,8 +25488,8 @@
           <a:noFill/>
         </p:spPr>
         <p:txBody>
-          <a:bodyPr wrap="square" lIns="45720" rIns="45720" tIns="18288" bIns="18288" anchor="t">
-            <a:spAutoFit/>
+          <a:bodyPr wrap="none" lIns="0" rIns="0" tIns="0" bIns="0" anchor="ctr">
+            <a:noAutofit/>
           </a:bodyPr>
           <a:lstStyle/>
           <a:p>
@@ -25495,7 +25518,7 @@
         </p:nvSpPr>
         <p:spPr>
           <a:xfrm>
-            <a:off x="7613294" y="429768"/>
+            <a:off x="7525511" y="425196"/>
             <a:ext cx="64008" cy="64008"/>
           </a:xfrm>
           <a:prstGeom prst="ellipse">
@@ -25539,8 +25562,8 @@
         </p:nvSpPr>
         <p:spPr>
           <a:xfrm>
-            <a:off x="7686446" y="384048"/>
-            <a:ext cx="263347" cy="146304"/>
+            <a:off x="7635240" y="384048"/>
+            <a:ext cx="182880" cy="146304"/>
           </a:xfrm>
           <a:prstGeom prst="rect">
             <a:avLst/>
@@ -25548,8 +25571,8 @@
           <a:noFill/>
         </p:spPr>
         <p:txBody>
-          <a:bodyPr wrap="square" lIns="45720" rIns="45720" tIns="18288" bIns="18288" anchor="t">
-            <a:spAutoFit/>
+          <a:bodyPr wrap="none" lIns="0" rIns="0" tIns="0" bIns="0" anchor="ctr">
+            <a:noAutofit/>
           </a:bodyPr>
           <a:lstStyle/>
           <a:p>
@@ -25578,7 +25601,7 @@
         </p:nvSpPr>
         <p:spPr>
           <a:xfrm>
-            <a:off x="7949793" y="429768"/>
+            <a:off x="7927847" y="425196"/>
             <a:ext cx="64008" cy="64008"/>
           </a:xfrm>
           <a:prstGeom prst="ellipse">
@@ -25622,8 +25645,8 @@
         </p:nvSpPr>
         <p:spPr>
           <a:xfrm>
-            <a:off x="8022945" y="384048"/>
-            <a:ext cx="186537" cy="146304"/>
+            <a:off x="8037575" y="384048"/>
+            <a:ext cx="91440" cy="146304"/>
           </a:xfrm>
           <a:prstGeom prst="rect">
             <a:avLst/>
@@ -25631,8 +25654,8 @@
           <a:noFill/>
         </p:spPr>
         <p:txBody>
-          <a:bodyPr wrap="square" lIns="45720" rIns="45720" tIns="18288" bIns="18288" anchor="t">
-            <a:spAutoFit/>
+          <a:bodyPr wrap="none" lIns="0" rIns="0" tIns="0" bIns="0" anchor="ctr">
+            <a:noAutofit/>
           </a:bodyPr>
           <a:lstStyle/>
           <a:p>
@@ -25661,7 +25684,7 @@
         </p:nvSpPr>
         <p:spPr>
           <a:xfrm>
-            <a:off x="8209483" y="429768"/>
+            <a:off x="8238743" y="425196"/>
             <a:ext cx="64008" cy="64008"/>
           </a:xfrm>
           <a:prstGeom prst="ellipse">
@@ -25705,8 +25728,8 @@
         </p:nvSpPr>
         <p:spPr>
           <a:xfrm>
-            <a:off x="8282635" y="384048"/>
-            <a:ext cx="340156" cy="146304"/>
+            <a:off x="8348471" y="384048"/>
+            <a:ext cx="274320" cy="146304"/>
           </a:xfrm>
           <a:prstGeom prst="rect">
             <a:avLst/>
@@ -25714,8 +25737,8 @@
           <a:noFill/>
         </p:spPr>
         <p:txBody>
-          <a:bodyPr wrap="square" lIns="45720" rIns="45720" tIns="18288" bIns="18288" anchor="t">
-            <a:spAutoFit/>
+          <a:bodyPr wrap="none" lIns="0" rIns="0" tIns="0" bIns="0" anchor="ctr">
+            <a:noAutofit/>
           </a:bodyPr>
           <a:lstStyle/>
           <a:p>
@@ -26855,7 +26878,7 @@
         </p:nvSpPr>
         <p:spPr>
           <a:xfrm>
-            <a:off x="6517843" y="429768"/>
+            <a:off x="6217919" y="425196"/>
             <a:ext cx="64008" cy="64008"/>
           </a:xfrm>
           <a:prstGeom prst="ellipse">
@@ -26899,8 +26922,8 @@
         </p:nvSpPr>
         <p:spPr>
           <a:xfrm>
-            <a:off x="6590995" y="384048"/>
-            <a:ext cx="570585" cy="146304"/>
+            <a:off x="6327647" y="384048"/>
+            <a:ext cx="548640" cy="146304"/>
           </a:xfrm>
           <a:prstGeom prst="rect">
             <a:avLst/>
@@ -26908,8 +26931,8 @@
           <a:noFill/>
         </p:spPr>
         <p:txBody>
-          <a:bodyPr wrap="square" lIns="45720" rIns="45720" tIns="18288" bIns="18288" anchor="t">
-            <a:spAutoFit/>
+          <a:bodyPr wrap="none" lIns="0" rIns="0" tIns="0" bIns="0" anchor="ctr">
+            <a:noAutofit/>
           </a:bodyPr>
           <a:lstStyle/>
           <a:p>
@@ -26938,7 +26961,7 @@
         </p:nvSpPr>
         <p:spPr>
           <a:xfrm>
-            <a:off x="7161580" y="429768"/>
+            <a:off x="6986015" y="425196"/>
             <a:ext cx="64008" cy="64008"/>
           </a:xfrm>
           <a:prstGeom prst="ellipse">
@@ -26982,8 +27005,8 @@
         </p:nvSpPr>
         <p:spPr>
           <a:xfrm>
-            <a:off x="7234732" y="384048"/>
-            <a:ext cx="378561" cy="146304"/>
+            <a:off x="7095743" y="384048"/>
+            <a:ext cx="320040" cy="146304"/>
           </a:xfrm>
           <a:prstGeom prst="rect">
             <a:avLst/>
@@ -26991,8 +27014,8 @@
           <a:noFill/>
         </p:spPr>
         <p:txBody>
-          <a:bodyPr wrap="square" lIns="45720" rIns="45720" tIns="18288" bIns="18288" anchor="t">
-            <a:spAutoFit/>
+          <a:bodyPr wrap="none" lIns="0" rIns="0" tIns="0" bIns="0" anchor="ctr">
+            <a:noAutofit/>
           </a:bodyPr>
           <a:lstStyle/>
           <a:p>
@@ -27021,7 +27044,7 @@
         </p:nvSpPr>
         <p:spPr>
           <a:xfrm>
-            <a:off x="7613294" y="429768"/>
+            <a:off x="7525511" y="425196"/>
             <a:ext cx="64008" cy="64008"/>
           </a:xfrm>
           <a:prstGeom prst="ellipse">
@@ -27065,8 +27088,8 @@
         </p:nvSpPr>
         <p:spPr>
           <a:xfrm>
-            <a:off x="7686446" y="384048"/>
-            <a:ext cx="263347" cy="146304"/>
+            <a:off x="7635240" y="384048"/>
+            <a:ext cx="182880" cy="146304"/>
           </a:xfrm>
           <a:prstGeom prst="rect">
             <a:avLst/>
@@ -27074,8 +27097,8 @@
           <a:noFill/>
         </p:spPr>
         <p:txBody>
-          <a:bodyPr wrap="square" lIns="45720" rIns="45720" tIns="18288" bIns="18288" anchor="t">
-            <a:spAutoFit/>
+          <a:bodyPr wrap="none" lIns="0" rIns="0" tIns="0" bIns="0" anchor="ctr">
+            <a:noAutofit/>
           </a:bodyPr>
           <a:lstStyle/>
           <a:p>
@@ -27104,7 +27127,7 @@
         </p:nvSpPr>
         <p:spPr>
           <a:xfrm>
-            <a:off x="7949793" y="429768"/>
+            <a:off x="7927847" y="425196"/>
             <a:ext cx="64008" cy="64008"/>
           </a:xfrm>
           <a:prstGeom prst="ellipse">
@@ -27148,8 +27171,8 @@
         </p:nvSpPr>
         <p:spPr>
           <a:xfrm>
-            <a:off x="8022945" y="384048"/>
-            <a:ext cx="186537" cy="146304"/>
+            <a:off x="8037575" y="384048"/>
+            <a:ext cx="91440" cy="146304"/>
           </a:xfrm>
           <a:prstGeom prst="rect">
             <a:avLst/>
@@ -27157,8 +27180,8 @@
           <a:noFill/>
         </p:spPr>
         <p:txBody>
-          <a:bodyPr wrap="square" lIns="45720" rIns="45720" tIns="18288" bIns="18288" anchor="t">
-            <a:spAutoFit/>
+          <a:bodyPr wrap="none" lIns="0" rIns="0" tIns="0" bIns="0" anchor="ctr">
+            <a:noAutofit/>
           </a:bodyPr>
           <a:lstStyle/>
           <a:p>
@@ -27187,7 +27210,7 @@
         </p:nvSpPr>
         <p:spPr>
           <a:xfrm>
-            <a:off x="8209483" y="429768"/>
+            <a:off x="8238743" y="425196"/>
             <a:ext cx="64008" cy="64008"/>
           </a:xfrm>
           <a:prstGeom prst="ellipse">
@@ -27231,8 +27254,8 @@
         </p:nvSpPr>
         <p:spPr>
           <a:xfrm>
-            <a:off x="8282635" y="384048"/>
-            <a:ext cx="340156" cy="146304"/>
+            <a:off x="8348471" y="384048"/>
+            <a:ext cx="274320" cy="146304"/>
           </a:xfrm>
           <a:prstGeom prst="rect">
             <a:avLst/>
@@ -27240,8 +27263,8 @@
           <a:noFill/>
         </p:spPr>
         <p:txBody>
-          <a:bodyPr wrap="square" lIns="45720" rIns="45720" tIns="18288" bIns="18288" anchor="t">
-            <a:spAutoFit/>
+          <a:bodyPr wrap="none" lIns="0" rIns="0" tIns="0" bIns="0" anchor="ctr">
+            <a:noAutofit/>
           </a:bodyPr>
           <a:lstStyle/>
           <a:p>
@@ -28968,7 +28991,7 @@
         </p:nvSpPr>
         <p:spPr>
           <a:xfrm>
-            <a:off x="6517843" y="429768"/>
+            <a:off x="6217919" y="425196"/>
             <a:ext cx="64008" cy="64008"/>
           </a:xfrm>
           <a:prstGeom prst="ellipse">
@@ -29012,8 +29035,8 @@
         </p:nvSpPr>
         <p:spPr>
           <a:xfrm>
-            <a:off x="6590995" y="384048"/>
-            <a:ext cx="570585" cy="146304"/>
+            <a:off x="6327647" y="384048"/>
+            <a:ext cx="548640" cy="146304"/>
           </a:xfrm>
           <a:prstGeom prst="rect">
             <a:avLst/>
@@ -29021,8 +29044,8 @@
           <a:noFill/>
         </p:spPr>
         <p:txBody>
-          <a:bodyPr wrap="square" lIns="45720" rIns="45720" tIns="18288" bIns="18288" anchor="t">
-            <a:spAutoFit/>
+          <a:bodyPr wrap="none" lIns="0" rIns="0" tIns="0" bIns="0" anchor="ctr">
+            <a:noAutofit/>
           </a:bodyPr>
           <a:lstStyle/>
           <a:p>
@@ -29051,7 +29074,7 @@
         </p:nvSpPr>
         <p:spPr>
           <a:xfrm>
-            <a:off x="7161580" y="429768"/>
+            <a:off x="6986015" y="425196"/>
             <a:ext cx="64008" cy="64008"/>
           </a:xfrm>
           <a:prstGeom prst="ellipse">
@@ -29095,8 +29118,8 @@
         </p:nvSpPr>
         <p:spPr>
           <a:xfrm>
-            <a:off x="7234732" y="384048"/>
-            <a:ext cx="378561" cy="146304"/>
+            <a:off x="7095743" y="384048"/>
+            <a:ext cx="320040" cy="146304"/>
           </a:xfrm>
           <a:prstGeom prst="rect">
             <a:avLst/>
@@ -29104,8 +29127,8 @@
           <a:noFill/>
         </p:spPr>
         <p:txBody>
-          <a:bodyPr wrap="square" lIns="45720" rIns="45720" tIns="18288" bIns="18288" anchor="t">
-            <a:spAutoFit/>
+          <a:bodyPr wrap="none" lIns="0" rIns="0" tIns="0" bIns="0" anchor="ctr">
+            <a:noAutofit/>
           </a:bodyPr>
           <a:lstStyle/>
           <a:p>
@@ -29134,7 +29157,7 @@
         </p:nvSpPr>
         <p:spPr>
           <a:xfrm>
-            <a:off x="7613294" y="429768"/>
+            <a:off x="7525511" y="425196"/>
             <a:ext cx="64008" cy="64008"/>
           </a:xfrm>
           <a:prstGeom prst="ellipse">
@@ -29178,8 +29201,8 @@
         </p:nvSpPr>
         <p:spPr>
           <a:xfrm>
-            <a:off x="7686446" y="384048"/>
-            <a:ext cx="263347" cy="146304"/>
+            <a:off x="7635240" y="384048"/>
+            <a:ext cx="182880" cy="146304"/>
           </a:xfrm>
           <a:prstGeom prst="rect">
             <a:avLst/>
@@ -29187,8 +29210,8 @@
           <a:noFill/>
         </p:spPr>
         <p:txBody>
-          <a:bodyPr wrap="square" lIns="45720" rIns="45720" tIns="18288" bIns="18288" anchor="t">
-            <a:spAutoFit/>
+          <a:bodyPr wrap="none" lIns="0" rIns="0" tIns="0" bIns="0" anchor="ctr">
+            <a:noAutofit/>
           </a:bodyPr>
           <a:lstStyle/>
           <a:p>
@@ -29217,7 +29240,7 @@
         </p:nvSpPr>
         <p:spPr>
           <a:xfrm>
-            <a:off x="7949793" y="429768"/>
+            <a:off x="7927847" y="425196"/>
             <a:ext cx="64008" cy="64008"/>
           </a:xfrm>
           <a:prstGeom prst="ellipse">
@@ -29261,8 +29284,8 @@
         </p:nvSpPr>
         <p:spPr>
           <a:xfrm>
-            <a:off x="8022945" y="384048"/>
-            <a:ext cx="186537" cy="146304"/>
+            <a:off x="8037575" y="384048"/>
+            <a:ext cx="91440" cy="146304"/>
           </a:xfrm>
           <a:prstGeom prst="rect">
             <a:avLst/>
@@ -29270,8 +29293,8 @@
           <a:noFill/>
         </p:spPr>
         <p:txBody>
-          <a:bodyPr wrap="square" lIns="45720" rIns="45720" tIns="18288" bIns="18288" anchor="t">
-            <a:spAutoFit/>
+          <a:bodyPr wrap="none" lIns="0" rIns="0" tIns="0" bIns="0" anchor="ctr">
+            <a:noAutofit/>
           </a:bodyPr>
           <a:lstStyle/>
           <a:p>
@@ -29300,7 +29323,7 @@
         </p:nvSpPr>
         <p:spPr>
           <a:xfrm>
-            <a:off x="8209483" y="429768"/>
+            <a:off x="8238743" y="425196"/>
             <a:ext cx="64008" cy="64008"/>
           </a:xfrm>
           <a:prstGeom prst="ellipse">
@@ -29344,8 +29367,8 @@
         </p:nvSpPr>
         <p:spPr>
           <a:xfrm>
-            <a:off x="8282635" y="384048"/>
-            <a:ext cx="340156" cy="146304"/>
+            <a:off x="8348471" y="384048"/>
+            <a:ext cx="274320" cy="146304"/>
           </a:xfrm>
           <a:prstGeom prst="rect">
             <a:avLst/>
@@ -29353,8 +29376,8 @@
           <a:noFill/>
         </p:spPr>
         <p:txBody>
-          <a:bodyPr wrap="square" lIns="45720" rIns="45720" tIns="18288" bIns="18288" anchor="t">
-            <a:spAutoFit/>
+          <a:bodyPr wrap="none" lIns="0" rIns="0" tIns="0" bIns="0" anchor="ctr">
+            <a:noAutofit/>
           </a:bodyPr>
           <a:lstStyle/>
           <a:p>
@@ -31172,19 +31195,65 @@
             <p:ph type="body" idx="1"/>
           </p:nvPr>
         </p:nvSpPr>
-        <p:spPr/>
-        <p:txBody>
-          <a:bodyPr wrap="square"/>
+        <p:spPr>
+          <a:xfrm>
+            <a:off x="548640" y="1188720"/>
+            <a:ext cx="8055864" cy="3474720"/>
+          </a:xfrm>
+        </p:spPr>
+        <p:txBody>
+          <a:bodyPr wrap="square" anchor="ctr" tIns="0" bIns="0"/>
           <a:lstStyle/>
           <a:p>
             <a:pPr marL="0" indent="0">
+              <a:spcAft>
+                <a:spcPts val="3071"/>
+              </a:spcAft>
               <a:buNone/>
+              <a:spcBef>
+                <a:spcPts val="0"/>
+              </a:spcBef>
+            </a:pPr>
+            <a:r>
+              <a:rPr sz="2000">
+                <a:solidFill>
+                  <a:srgbClr val="5FFA74"/>
+                </a:solidFill>
+                <a:latin typeface="Inter"/>
+              </a:rPr>
+              <a:t>▸  </a:t>
+            </a:r>
+            <a:r>
+              <a:rPr sz="2000" b="1">
+                <a:solidFill>
+                  <a:srgbClr val="FFFFFF"/>
+                </a:solidFill>
+                <a:latin typeface="Inter"/>
+              </a:rPr>
+              <a:t>The data has no schema</a:t>
+            </a:r>
+            <a:r>
+              <a:rPr sz="2000" b="0">
+                <a:solidFill>
+                  <a:srgbClr val="FFFFFF"/>
+                </a:solidFill>
+                <a:latin typeface="Inter"/>
+              </a:rPr>
+              <a:t>: mixed types, nested, missing fields</a:t>
+            </a:r>
+          </a:p>
+          <a:p>
+            <a:pPr marL="0" indent="0">
               <a:spcAft>
-                <a:spcPts val="900"/>
+                <a:spcPts val="3071"/>
               </a:spcAft>
+              <a:buNone/>
+              <a:spcBef>
+                <a:spcPts val="0"/>
+              </a:spcBef>
             </a:pPr>
             <a:r>
-              <a:rPr sz="1300">
+              <a:rPr sz="2000">
                 <a:solidFill>
                   <a:srgbClr val="5FFA74"/>
                 </a:solidFill>
@@ -31193,33 +31262,74 @@
               <a:t>▸  </a:t>
             </a:r>
             <a:r>
-              <a:rPr sz="1300" b="1">
+              <a:rPr sz="2000" b="1">
                 <a:solidFill>
                   <a:srgbClr val="FFFFFF"/>
                 </a:solidFill>
                 <a:latin typeface="Inter"/>
               </a:rPr>
-              <a:t>The data has no schema</a:t>
-            </a:r>
-            <a:r>
-              <a:rPr sz="1300" b="0">
+              <a:t>The code speaks MongoDB</a:t>
+            </a:r>
+            <a:r>
+              <a:rPr sz="2000" b="0">
                 <a:solidFill>
                   <a:srgbClr val="FFFFFF"/>
                 </a:solidFill>
                 <a:latin typeface="Inter"/>
               </a:rPr>
-              <a:t>: mixed types, nested, missing fields</a:t>
+              <a:t>: driver, queries, seed data</a:t>
             </a:r>
           </a:p>
           <a:p>
             <a:pPr marL="0" indent="0">
+              <a:spcAft>
+                <a:spcPts val="3071"/>
+              </a:spcAft>
               <a:buNone/>
+              <a:spcBef>
+                <a:spcPts val="0"/>
+              </a:spcBef>
+            </a:pPr>
+            <a:r>
+              <a:rPr sz="2000">
+                <a:solidFill>
+                  <a:srgbClr val="5FFA74"/>
+                </a:solidFill>
+                <a:latin typeface="Inter"/>
+              </a:rPr>
+              <a:t>▸  </a:t>
+            </a:r>
+            <a:r>
+              <a:rPr sz="2000" b="1">
+                <a:solidFill>
+                  <a:srgbClr val="FFFFFF"/>
+                </a:solidFill>
+                <a:latin typeface="Inter"/>
+              </a:rPr>
+              <a:t>The API must not change</a:t>
+            </a:r>
+            <a:r>
+              <a:rPr sz="2000" b="0">
+                <a:solidFill>
+                  <a:srgbClr val="FFFFFF"/>
+                </a:solidFill>
+                <a:latin typeface="Inter"/>
+              </a:rPr>
+              <a:t>: same routes, same JSON</a:t>
+            </a:r>
+          </a:p>
+          <a:p>
+            <a:pPr marL="0" indent="0">
               <a:spcAft>
-                <a:spcPts val="900"/>
+                <a:spcPts val="0"/>
               </a:spcAft>
+              <a:buNone/>
+              <a:spcBef>
+                <a:spcPts val="0"/>
+              </a:spcBef>
             </a:pPr>
             <a:r>
-              <a:rPr sz="1300">
+              <a:rPr sz="2000">
                 <a:solidFill>
                   <a:srgbClr val="5FFA74"/>
                 </a:solidFill>
@@ -31228,86 +31338,16 @@
               <a:t>▸  </a:t>
             </a:r>
             <a:r>
-              <a:rPr sz="1300" b="1">
+              <a:rPr sz="2000" b="1">
                 <a:solidFill>
                   <a:srgbClr val="FFFFFF"/>
                 </a:solidFill>
                 <a:latin typeface="Inter"/>
               </a:rPr>
-              <a:t>The code speaks MongoDB</a:t>
-            </a:r>
-            <a:r>
-              <a:rPr sz="1300" b="0">
-                <a:solidFill>
-                  <a:srgbClr val="FFFFFF"/>
-                </a:solidFill>
-                <a:latin typeface="Inter"/>
-              </a:rPr>
-              <a:t>: driver, queries, seed data</a:t>
-            </a:r>
-          </a:p>
-          <a:p>
-            <a:pPr marL="0" indent="0">
-              <a:buNone/>
-              <a:spcAft>
-                <a:spcPts val="900"/>
-              </a:spcAft>
-            </a:pPr>
-            <a:r>
-              <a:rPr sz="1300">
-                <a:solidFill>
-                  <a:srgbClr val="5FFA74"/>
-                </a:solidFill>
-                <a:latin typeface="Inter"/>
-              </a:rPr>
-              <a:t>▸  </a:t>
-            </a:r>
-            <a:r>
-              <a:rPr sz="1300" b="1">
-                <a:solidFill>
-                  <a:srgbClr val="FFFFFF"/>
-                </a:solidFill>
-                <a:latin typeface="Inter"/>
-              </a:rPr>
-              <a:t>The API must not change</a:t>
-            </a:r>
-            <a:r>
-              <a:rPr sz="1300" b="0">
-                <a:solidFill>
-                  <a:srgbClr val="FFFFFF"/>
-                </a:solidFill>
-                <a:latin typeface="Inter"/>
-              </a:rPr>
-              <a:t>: same routes, same JSON</a:t>
-            </a:r>
-          </a:p>
-          <a:p>
-            <a:pPr marL="0" indent="0">
-              <a:buNone/>
-              <a:spcAft>
-                <a:spcPts val="900"/>
-              </a:spcAft>
-            </a:pPr>
-            <a:r>
-              <a:rPr sz="1300">
-                <a:solidFill>
-                  <a:srgbClr val="5FFA74"/>
-                </a:solidFill>
-                <a:latin typeface="Inter"/>
-              </a:rPr>
-              <a:t>▸  </a:t>
-            </a:r>
-            <a:r>
-              <a:rPr sz="1300" b="1">
-                <a:solidFill>
-                  <a:srgbClr val="FFFFFF"/>
-                </a:solidFill>
-                <a:latin typeface="Inter"/>
-              </a:rPr>
               <a:t>Proof is expensive</a:t>
             </a:r>
             <a:r>
-              <a:rPr sz="1300" b="0">
+              <a:rPr sz="2000" b="0">
                 <a:solidFill>
                   <a:srgbClr val="FFFFFF"/>
                 </a:solidFill>
@@ -31470,7 +31510,7 @@
         </p:nvSpPr>
         <p:spPr>
           <a:xfrm>
-            <a:off x="6517843" y="429768"/>
+            <a:off x="6217919" y="425196"/>
             <a:ext cx="64008" cy="64008"/>
           </a:xfrm>
           <a:prstGeom prst="ellipse">
@@ -31514,8 +31554,8 @@
         </p:nvSpPr>
         <p:spPr>
           <a:xfrm>
-            <a:off x="6590995" y="384048"/>
-            <a:ext cx="570585" cy="146304"/>
+            <a:off x="6327647" y="384048"/>
+            <a:ext cx="548640" cy="146304"/>
           </a:xfrm>
           <a:prstGeom prst="rect">
             <a:avLst/>
@@ -31523,8 +31563,8 @@
           <a:noFill/>
         </p:spPr>
         <p:txBody>
-          <a:bodyPr wrap="square" lIns="45720" rIns="45720" tIns="18288" bIns="18288" anchor="t">
-            <a:spAutoFit/>
+          <a:bodyPr wrap="none" lIns="0" rIns="0" tIns="0" bIns="0" anchor="ctr">
+            <a:noAutofit/>
           </a:bodyPr>
           <a:lstStyle/>
           <a:p>
@@ -31553,7 +31593,7 @@
         </p:nvSpPr>
         <p:spPr>
           <a:xfrm>
-            <a:off x="7161580" y="429768"/>
+            <a:off x="6986015" y="425196"/>
             <a:ext cx="64008" cy="64008"/>
           </a:xfrm>
           <a:prstGeom prst="ellipse">
@@ -31597,8 +31637,8 @@
         </p:nvSpPr>
         <p:spPr>
           <a:xfrm>
-            <a:off x="7234732" y="384048"/>
-            <a:ext cx="378561" cy="146304"/>
+            <a:off x="7095743" y="384048"/>
+            <a:ext cx="320040" cy="146304"/>
           </a:xfrm>
           <a:prstGeom prst="rect">
             <a:avLst/>
@@ -31606,8 +31646,8 @@
           <a:noFill/>
         </p:spPr>
         <p:txBody>
-          <a:bodyPr wrap="square" lIns="45720" rIns="45720" tIns="18288" bIns="18288" anchor="t">
-            <a:spAutoFit/>
+          <a:bodyPr wrap="none" lIns="0" rIns="0" tIns="0" bIns="0" anchor="ctr">
+            <a:noAutofit/>
           </a:bodyPr>
           <a:lstStyle/>
           <a:p>
@@ -31636,7 +31676,7 @@
         </p:nvSpPr>
         <p:spPr>
           <a:xfrm>
-            <a:off x="7613294" y="429768"/>
+            <a:off x="7525511" y="425196"/>
             <a:ext cx="64008" cy="64008"/>
           </a:xfrm>
           <a:prstGeom prst="ellipse">
@@ -31680,8 +31720,8 @@
         </p:nvSpPr>
         <p:spPr>
           <a:xfrm>
-            <a:off x="7686446" y="384048"/>
-            <a:ext cx="263347" cy="146304"/>
+            <a:off x="7635240" y="384048"/>
+            <a:ext cx="182880" cy="146304"/>
           </a:xfrm>
           <a:prstGeom prst="rect">
             <a:avLst/>
@@ -31689,8 +31729,8 @@
           <a:noFill/>
         </p:spPr>
         <p:txBody>
-          <a:bodyPr wrap="square" lIns="45720" rIns="45720" tIns="18288" bIns="18288" anchor="t">
-            <a:spAutoFit/>
+          <a:bodyPr wrap="none" lIns="0" rIns="0" tIns="0" bIns="0" anchor="ctr">
+            <a:noAutofit/>
           </a:bodyPr>
           <a:lstStyle/>
           <a:p>
@@ -31719,7 +31759,7 @@
         </p:nvSpPr>
         <p:spPr>
           <a:xfrm>
-            <a:off x="7949793" y="429768"/>
+            <a:off x="7927847" y="425196"/>
             <a:ext cx="64008" cy="64008"/>
           </a:xfrm>
           <a:prstGeom prst="ellipse">
@@ -31763,8 +31803,8 @@
         </p:nvSpPr>
         <p:spPr>
           <a:xfrm>
-            <a:off x="8022945" y="384048"/>
-            <a:ext cx="186537" cy="146304"/>
+            <a:off x="8037575" y="384048"/>
+            <a:ext cx="91440" cy="146304"/>
           </a:xfrm>
           <a:prstGeom prst="rect">
             <a:avLst/>
@@ -31772,8 +31812,8 @@
           <a:noFill/>
         </p:spPr>
         <p:txBody>
-          <a:bodyPr wrap="square" lIns="45720" rIns="45720" tIns="18288" bIns="18288" anchor="t">
-            <a:spAutoFit/>
+          <a:bodyPr wrap="none" lIns="0" rIns="0" tIns="0" bIns="0" anchor="ctr">
+            <a:noAutofit/>
           </a:bodyPr>
           <a:lstStyle/>
           <a:p>
@@ -31802,7 +31842,7 @@
         </p:nvSpPr>
         <p:spPr>
           <a:xfrm>
-            <a:off x="8209483" y="429768"/>
+            <a:off x="8238743" y="425196"/>
             <a:ext cx="64008" cy="64008"/>
           </a:xfrm>
           <a:prstGeom prst="ellipse">
@@ -31846,8 +31886,8 @@
         </p:nvSpPr>
         <p:spPr>
           <a:xfrm>
-            <a:off x="8282635" y="384048"/>
-            <a:ext cx="340156" cy="146304"/>
+            <a:off x="8348471" y="384048"/>
+            <a:ext cx="274320" cy="146304"/>
           </a:xfrm>
           <a:prstGeom prst="rect">
             <a:avLst/>
@@ -31855,8 +31895,8 @@
           <a:noFill/>
         </p:spPr>
         <p:txBody>
-          <a:bodyPr wrap="square" lIns="45720" rIns="45720" tIns="18288" bIns="18288" anchor="t">
-            <a:spAutoFit/>
+          <a:bodyPr wrap="none" lIns="0" rIns="0" tIns="0" bIns="0" anchor="ctr">
+            <a:noAutofit/>
           </a:bodyPr>
           <a:lstStyle/>
           <a:p>
@@ -33962,7 +34002,7 @@
         </p:nvSpPr>
         <p:spPr>
           <a:xfrm>
-            <a:off x="6517843" y="429768"/>
+            <a:off x="6217919" y="425196"/>
             <a:ext cx="64008" cy="64008"/>
           </a:xfrm>
           <a:prstGeom prst="ellipse">
@@ -34006,8 +34046,8 @@
         </p:nvSpPr>
         <p:spPr>
           <a:xfrm>
-            <a:off x="6590995" y="384048"/>
-            <a:ext cx="570585" cy="146304"/>
+            <a:off x="6327647" y="384048"/>
+            <a:ext cx="548640" cy="146304"/>
           </a:xfrm>
           <a:prstGeom prst="rect">
             <a:avLst/>
@@ -34015,8 +34055,8 @@
           <a:noFill/>
         </p:spPr>
         <p:txBody>
-          <a:bodyPr wrap="square" lIns="45720" rIns="45720" tIns="18288" bIns="18288" anchor="t">
-            <a:spAutoFit/>
+          <a:bodyPr wrap="none" lIns="0" rIns="0" tIns="0" bIns="0" anchor="ctr">
+            <a:noAutofit/>
           </a:bodyPr>
           <a:lstStyle/>
           <a:p>
@@ -34045,7 +34085,7 @@
         </p:nvSpPr>
         <p:spPr>
           <a:xfrm>
-            <a:off x="7161580" y="429768"/>
+            <a:off x="6986015" y="425196"/>
             <a:ext cx="64008" cy="64008"/>
           </a:xfrm>
           <a:prstGeom prst="ellipse">
@@ -34089,8 +34129,8 @@
         </p:nvSpPr>
         <p:spPr>
           <a:xfrm>
-            <a:off x="7234732" y="384048"/>
-            <a:ext cx="378561" cy="146304"/>
+            <a:off x="7095743" y="384048"/>
+            <a:ext cx="320040" cy="146304"/>
           </a:xfrm>
           <a:prstGeom prst="rect">
             <a:avLst/>
@@ -34098,8 +34138,8 @@
           <a:noFill/>
         </p:spPr>
         <p:txBody>
-          <a:bodyPr wrap="square" lIns="45720" rIns="45720" tIns="18288" bIns="18288" anchor="t">
-            <a:spAutoFit/>
+          <a:bodyPr wrap="none" lIns="0" rIns="0" tIns="0" bIns="0" anchor="ctr">
+            <a:noAutofit/>
           </a:bodyPr>
           <a:lstStyle/>
           <a:p>
@@ -34128,7 +34168,7 @@
         </p:nvSpPr>
         <p:spPr>
           <a:xfrm>
-            <a:off x="7613294" y="429768"/>
+            <a:off x="7525511" y="425196"/>
             <a:ext cx="64008" cy="64008"/>
           </a:xfrm>
           <a:prstGeom prst="ellipse">
@@ -34172,8 +34212,8 @@
         </p:nvSpPr>
         <p:spPr>
           <a:xfrm>
-            <a:off x="7686446" y="384048"/>
-            <a:ext cx="263347" cy="146304"/>
+            <a:off x="7635240" y="384048"/>
+            <a:ext cx="182880" cy="146304"/>
           </a:xfrm>
           <a:prstGeom prst="rect">
             <a:avLst/>
@@ -34181,8 +34221,8 @@
           <a:noFill/>
         </p:spPr>
         <p:txBody>
-          <a:bodyPr wrap="square" lIns="45720" rIns="45720" tIns="18288" bIns="18288" anchor="t">
-            <a:spAutoFit/>
+          <a:bodyPr wrap="none" lIns="0" rIns="0" tIns="0" bIns="0" anchor="ctr">
+            <a:noAutofit/>
           </a:bodyPr>
           <a:lstStyle/>
           <a:p>
@@ -34211,7 +34251,7 @@
         </p:nvSpPr>
         <p:spPr>
           <a:xfrm>
-            <a:off x="7949793" y="429768"/>
+            <a:off x="7927847" y="425196"/>
             <a:ext cx="64008" cy="64008"/>
           </a:xfrm>
           <a:prstGeom prst="ellipse">
@@ -34255,8 +34295,8 @@
         </p:nvSpPr>
         <p:spPr>
           <a:xfrm>
-            <a:off x="8022945" y="384048"/>
-            <a:ext cx="186537" cy="146304"/>
+            <a:off x="8037575" y="384048"/>
+            <a:ext cx="91440" cy="146304"/>
           </a:xfrm>
           <a:prstGeom prst="rect">
             <a:avLst/>
@@ -34264,8 +34304,8 @@
           <a:noFill/>
         </p:spPr>
         <p:txBody>
-          <a:bodyPr wrap="square" lIns="45720" rIns="45720" tIns="18288" bIns="18288" anchor="t">
-            <a:spAutoFit/>
+          <a:bodyPr wrap="none" lIns="0" rIns="0" tIns="0" bIns="0" anchor="ctr">
+            <a:noAutofit/>
           </a:bodyPr>
           <a:lstStyle/>
           <a:p>
@@ -34294,7 +34334,7 @@
         </p:nvSpPr>
         <p:spPr>
           <a:xfrm>
-            <a:off x="8209483" y="429768"/>
+            <a:off x="8238743" y="425196"/>
             <a:ext cx="64008" cy="64008"/>
           </a:xfrm>
           <a:prstGeom prst="ellipse">
@@ -34338,8 +34378,8 @@
         </p:nvSpPr>
         <p:spPr>
           <a:xfrm>
-            <a:off x="8282635" y="384048"/>
-            <a:ext cx="340156" cy="146304"/>
+            <a:off x="8348471" y="384048"/>
+            <a:ext cx="274320" cy="146304"/>
           </a:xfrm>
           <a:prstGeom prst="rect">
             <a:avLst/>
@@ -34347,8 +34387,8 @@
           <a:noFill/>
         </p:spPr>
         <p:txBody>
-          <a:bodyPr wrap="square" lIns="45720" rIns="45720" tIns="18288" bIns="18288" anchor="t">
-            <a:spAutoFit/>
+          <a:bodyPr wrap="none" lIns="0" rIns="0" tIns="0" bIns="0" anchor="ctr">
+            <a:noAutofit/>
           </a:bodyPr>
           <a:lstStyle/>
           <a:p>
@@ -36538,7 +36578,7 @@
         </p:nvSpPr>
         <p:spPr>
           <a:xfrm>
-            <a:off x="6517843" y="429768"/>
+            <a:off x="6217919" y="425196"/>
             <a:ext cx="64008" cy="64008"/>
           </a:xfrm>
           <a:prstGeom prst="ellipse">
@@ -36582,8 +36622,8 @@
         </p:nvSpPr>
         <p:spPr>
           <a:xfrm>
-            <a:off x="6590995" y="384048"/>
-            <a:ext cx="570585" cy="146304"/>
+            <a:off x="6327647" y="384048"/>
+            <a:ext cx="548640" cy="146304"/>
           </a:xfrm>
           <a:prstGeom prst="rect">
             <a:avLst/>
@@ -36591,8 +36631,8 @@
           <a:noFill/>
         </p:spPr>
         <p:txBody>
-          <a:bodyPr wrap="square" lIns="45720" rIns="45720" tIns="18288" bIns="18288" anchor="t">
-            <a:spAutoFit/>
+          <a:bodyPr wrap="none" lIns="0" rIns="0" tIns="0" bIns="0" anchor="ctr">
+            <a:noAutofit/>
           </a:bodyPr>
           <a:lstStyle/>
           <a:p>
@@ -36621,7 +36661,7 @@
         </p:nvSpPr>
         <p:spPr>
           <a:xfrm>
-            <a:off x="7161580" y="429768"/>
+            <a:off x="6986015" y="425196"/>
             <a:ext cx="64008" cy="64008"/>
           </a:xfrm>
           <a:prstGeom prst="ellipse">
@@ -36665,8 +36705,8 @@
         </p:nvSpPr>
         <p:spPr>
           <a:xfrm>
-            <a:off x="7234732" y="384048"/>
-            <a:ext cx="378561" cy="146304"/>
+            <a:off x="7095743" y="384048"/>
+            <a:ext cx="320040" cy="146304"/>
           </a:xfrm>
           <a:prstGeom prst="rect">
             <a:avLst/>
@@ -36674,8 +36714,8 @@
           <a:noFill/>
         </p:spPr>
         <p:txBody>
-          <a:bodyPr wrap="square" lIns="45720" rIns="45720" tIns="18288" bIns="18288" anchor="t">
-            <a:spAutoFit/>
+          <a:bodyPr wrap="none" lIns="0" rIns="0" tIns="0" bIns="0" anchor="ctr">
+            <a:noAutofit/>
           </a:bodyPr>
           <a:lstStyle/>
           <a:p>
@@ -36704,7 +36744,7 @@
         </p:nvSpPr>
         <p:spPr>
           <a:xfrm>
-            <a:off x="7613294" y="429768"/>
+            <a:off x="7525511" y="425196"/>
             <a:ext cx="64008" cy="64008"/>
           </a:xfrm>
           <a:prstGeom prst="ellipse">
@@ -36748,8 +36788,8 @@
         </p:nvSpPr>
         <p:spPr>
           <a:xfrm>
-            <a:off x="7686446" y="384048"/>
-            <a:ext cx="263347" cy="146304"/>
+            <a:off x="7635240" y="384048"/>
+            <a:ext cx="182880" cy="146304"/>
           </a:xfrm>
           <a:prstGeom prst="rect">
             <a:avLst/>
@@ -36757,8 +36797,8 @@
           <a:noFill/>
         </p:spPr>
         <p:txBody>
-          <a:bodyPr wrap="square" lIns="45720" rIns="45720" tIns="18288" bIns="18288" anchor="t">
-            <a:spAutoFit/>
+          <a:bodyPr wrap="none" lIns="0" rIns="0" tIns="0" bIns="0" anchor="ctr">
+            <a:noAutofit/>
           </a:bodyPr>
           <a:lstStyle/>
           <a:p>
@@ -36787,7 +36827,7 @@
         </p:nvSpPr>
         <p:spPr>
           <a:xfrm>
-            <a:off x="7949793" y="429768"/>
+            <a:off x="7927847" y="425196"/>
             <a:ext cx="64008" cy="64008"/>
           </a:xfrm>
           <a:prstGeom prst="ellipse">
@@ -36831,8 +36871,8 @@
         </p:nvSpPr>
         <p:spPr>
           <a:xfrm>
-            <a:off x="8022945" y="384048"/>
-            <a:ext cx="186537" cy="146304"/>
+            <a:off x="8037575" y="384048"/>
+            <a:ext cx="91440" cy="146304"/>
           </a:xfrm>
           <a:prstGeom prst="rect">
             <a:avLst/>
@@ -36840,8 +36880,8 @@
           <a:noFill/>
         </p:spPr>
         <p:txBody>
-          <a:bodyPr wrap="square" lIns="45720" rIns="45720" tIns="18288" bIns="18288" anchor="t">
-            <a:spAutoFit/>
+          <a:bodyPr wrap="none" lIns="0" rIns="0" tIns="0" bIns="0" anchor="ctr">
+            <a:noAutofit/>
           </a:bodyPr>
           <a:lstStyle/>
           <a:p>
@@ -36870,7 +36910,7 @@
         </p:nvSpPr>
         <p:spPr>
           <a:xfrm>
-            <a:off x="8209483" y="429768"/>
+            <a:off x="8238743" y="425196"/>
             <a:ext cx="64008" cy="64008"/>
           </a:xfrm>
           <a:prstGeom prst="ellipse">
@@ -36914,8 +36954,8 @@
         </p:nvSpPr>
         <p:spPr>
           <a:xfrm>
-            <a:off x="8282635" y="384048"/>
-            <a:ext cx="340156" cy="146304"/>
+            <a:off x="8348471" y="384048"/>
+            <a:ext cx="274320" cy="146304"/>
           </a:xfrm>
           <a:prstGeom prst="rect">
             <a:avLst/>
@@ -36923,8 +36963,8 @@
           <a:noFill/>
         </p:spPr>
         <p:txBody>
-          <a:bodyPr wrap="square" lIns="45720" rIns="45720" tIns="18288" bIns="18288" anchor="t">
-            <a:spAutoFit/>
+          <a:bodyPr wrap="none" lIns="0" rIns="0" tIns="0" bIns="0" anchor="ctr">
+            <a:noAutofit/>
           </a:bodyPr>
           <a:lstStyle/>
           <a:p>
@@ -39414,7 +39454,7 @@
         </p:nvSpPr>
         <p:spPr>
           <a:xfrm>
-            <a:off x="6517843" y="429768"/>
+            <a:off x="6217919" y="425196"/>
             <a:ext cx="64008" cy="64008"/>
           </a:xfrm>
           <a:prstGeom prst="ellipse">
@@ -39458,8 +39498,8 @@
         </p:nvSpPr>
         <p:spPr>
           <a:xfrm>
-            <a:off x="6590995" y="384048"/>
-            <a:ext cx="570585" cy="146304"/>
+            <a:off x="6327647" y="384048"/>
+            <a:ext cx="548640" cy="146304"/>
           </a:xfrm>
           <a:prstGeom prst="rect">
             <a:avLst/>
@@ -39467,8 +39507,8 @@
           <a:noFill/>
         </p:spPr>
         <p:txBody>
-          <a:bodyPr wrap="square" lIns="45720" rIns="45720" tIns="18288" bIns="18288" anchor="t">
-            <a:spAutoFit/>
+          <a:bodyPr wrap="none" lIns="0" rIns="0" tIns="0" bIns="0" anchor="ctr">
+            <a:noAutofit/>
           </a:bodyPr>
           <a:lstStyle/>
           <a:p>
@@ -39497,7 +39537,7 @@
         </p:nvSpPr>
         <p:spPr>
           <a:xfrm>
-            <a:off x="7161580" y="429768"/>
+            <a:off x="6986015" y="425196"/>
             <a:ext cx="64008" cy="64008"/>
           </a:xfrm>
           <a:prstGeom prst="ellipse">
@@ -39541,8 +39581,8 @@
         </p:nvSpPr>
         <p:spPr>
           <a:xfrm>
-            <a:off x="7234732" y="384048"/>
-            <a:ext cx="378561" cy="146304"/>
+            <a:off x="7095743" y="384048"/>
+            <a:ext cx="320040" cy="146304"/>
           </a:xfrm>
           <a:prstGeom prst="rect">
             <a:avLst/>
@@ -39550,8 +39590,8 @@
           <a:noFill/>
         </p:spPr>
         <p:txBody>
-          <a:bodyPr wrap="square" lIns="45720" rIns="45720" tIns="18288" bIns="18288" anchor="t">
-            <a:spAutoFit/>
+          <a:bodyPr wrap="none" lIns="0" rIns="0" tIns="0" bIns="0" anchor="ctr">
+            <a:noAutofit/>
           </a:bodyPr>
           <a:lstStyle/>
           <a:p>
@@ -39580,7 +39620,7 @@
         </p:nvSpPr>
         <p:spPr>
           <a:xfrm>
-            <a:off x="7613294" y="429768"/>
+            <a:off x="7525511" y="425196"/>
             <a:ext cx="64008" cy="64008"/>
           </a:xfrm>
           <a:prstGeom prst="ellipse">
@@ -39624,8 +39664,8 @@
         </p:nvSpPr>
         <p:spPr>
           <a:xfrm>
-            <a:off x="7686446" y="384048"/>
-            <a:ext cx="263347" cy="146304"/>
+            <a:off x="7635240" y="384048"/>
+            <a:ext cx="182880" cy="146304"/>
           </a:xfrm>
           <a:prstGeom prst="rect">
             <a:avLst/>
@@ -39633,8 +39673,8 @@
           <a:noFill/>
         </p:spPr>
         <p:txBody>
-          <a:bodyPr wrap="square" lIns="45720" rIns="45720" tIns="18288" bIns="18288" anchor="t">
-            <a:spAutoFit/>
+          <a:bodyPr wrap="none" lIns="0" rIns="0" tIns="0" bIns="0" anchor="ctr">
+            <a:noAutofit/>
           </a:bodyPr>
           <a:lstStyle/>
           <a:p>
@@ -39663,7 +39703,7 @@
         </p:nvSpPr>
         <p:spPr>
           <a:xfrm>
-            <a:off x="7949793" y="429768"/>
+            <a:off x="7927847" y="425196"/>
             <a:ext cx="64008" cy="64008"/>
           </a:xfrm>
           <a:prstGeom prst="ellipse">
@@ -39707,8 +39747,8 @@
         </p:nvSpPr>
         <p:spPr>
           <a:xfrm>
-            <a:off x="8022945" y="384048"/>
-            <a:ext cx="186537" cy="146304"/>
+            <a:off x="8037575" y="384048"/>
+            <a:ext cx="91440" cy="146304"/>
           </a:xfrm>
           <a:prstGeom prst="rect">
             <a:avLst/>
@@ -39716,8 +39756,8 @@
           <a:noFill/>
         </p:spPr>
         <p:txBody>
-          <a:bodyPr wrap="square" lIns="45720" rIns="45720" tIns="18288" bIns="18288" anchor="t">
-            <a:spAutoFit/>
+          <a:bodyPr wrap="none" lIns="0" rIns="0" tIns="0" bIns="0" anchor="ctr">
+            <a:noAutofit/>
           </a:bodyPr>
           <a:lstStyle/>
           <a:p>
@@ -39746,7 +39786,7 @@
         </p:nvSpPr>
         <p:spPr>
           <a:xfrm>
-            <a:off x="8209483" y="429768"/>
+            <a:off x="8238743" y="425196"/>
             <a:ext cx="64008" cy="64008"/>
           </a:xfrm>
           <a:prstGeom prst="ellipse">
@@ -39790,8 +39830,8 @@
         </p:nvSpPr>
         <p:spPr>
           <a:xfrm>
-            <a:off x="8282635" y="384048"/>
-            <a:ext cx="340156" cy="146304"/>
+            <a:off x="8348471" y="384048"/>
+            <a:ext cx="274320" cy="146304"/>
           </a:xfrm>
           <a:prstGeom prst="rect">
             <a:avLst/>
@@ -39799,8 +39839,8 @@
           <a:noFill/>
         </p:spPr>
         <p:txBody>
-          <a:bodyPr wrap="square" lIns="45720" rIns="45720" tIns="18288" bIns="18288" anchor="t">
-            <a:spAutoFit/>
+          <a:bodyPr wrap="none" lIns="0" rIns="0" tIns="0" bIns="0" anchor="ctr">
+            <a:noAutofit/>
           </a:bodyPr>
           <a:lstStyle/>
           <a:p>
@@ -42426,19 +42466,65 @@
             <p:ph type="body" idx="1"/>
           </p:nvPr>
         </p:nvSpPr>
-        <p:spPr/>
-        <p:txBody>
-          <a:bodyPr wrap="square"/>
+        <p:spPr>
+          <a:xfrm>
+            <a:off x="548640" y="1188720"/>
+            <a:ext cx="8055864" cy="3474720"/>
+          </a:xfrm>
+        </p:spPr>
+        <p:txBody>
+          <a:bodyPr wrap="square" anchor="ctr" tIns="0" bIns="0"/>
           <a:lstStyle/>
           <a:p>
             <a:pPr marL="0" indent="0">
+              <a:spcAft>
+                <a:spcPts val="3552"/>
+              </a:spcAft>
               <a:buNone/>
+              <a:spcBef>
+                <a:spcPts val="0"/>
+              </a:spcBef>
+            </a:pPr>
+            <a:r>
+              <a:rPr sz="2000">
+                <a:solidFill>
+                  <a:srgbClr val="5FFA74"/>
+                </a:solidFill>
+                <a:latin typeface="Inter"/>
+              </a:rPr>
+              <a:t>▸  </a:t>
+            </a:r>
+            <a:r>
+              <a:rPr sz="2000" b="1">
+                <a:solidFill>
+                  <a:srgbClr val="FFFFFF"/>
+                </a:solidFill>
+                <a:latin typeface="Inter"/>
+              </a:rPr>
+              <a:t>A sandbox</a:t>
+            </a:r>
+            <a:r>
+              <a:rPr sz="2000" b="0">
+                <a:solidFill>
+                  <a:srgbClr val="FFFFFF"/>
+                </a:solidFill>
+                <a:latin typeface="Inter"/>
+              </a:rPr>
+              <a:t>: the new app, beside the running one</a:t>
+            </a:r>
+          </a:p>
+          <a:p>
+            <a:pPr marL="0" indent="0">
               <a:spcAft>
-                <a:spcPts val="900"/>
+                <a:spcPts val="3552"/>
               </a:spcAft>
+              <a:buNone/>
+              <a:spcBef>
+                <a:spcPts val="0"/>
+              </a:spcBef>
             </a:pPr>
             <a:r>
-              <a:rPr sz="1300">
+              <a:rPr sz="2000">
                 <a:solidFill>
                   <a:srgbClr val="5FFA74"/>
                 </a:solidFill>
@@ -42447,33 +42533,74 @@
               <a:t>▸  </a:t>
             </a:r>
             <a:r>
-              <a:rPr sz="1300" b="1">
+              <a:rPr sz="2000" b="1">
                 <a:solidFill>
                   <a:srgbClr val="FFFFFF"/>
                 </a:solidFill>
                 <a:latin typeface="Inter"/>
               </a:rPr>
-              <a:t>A sandbox</a:t>
-            </a:r>
-            <a:r>
-              <a:rPr sz="1300" b="0">
+              <a:t>Then a pull request</a:t>
+            </a:r>
+            <a:r>
+              <a:rPr sz="2000" b="0">
                 <a:solidFill>
                   <a:srgbClr val="FFFFFF"/>
                 </a:solidFill>
                 <a:latin typeface="Inter"/>
               </a:rPr>
-              <a:t>: the new app, beside the running one</a:t>
+              <a:t>, with a preview URL</a:t>
             </a:r>
           </a:p>
           <a:p>
             <a:pPr marL="0" indent="0">
+              <a:spcAft>
+                <a:spcPts val="3552"/>
+              </a:spcAft>
               <a:buNone/>
+              <a:spcBef>
+                <a:spcPts val="0"/>
+              </a:spcBef>
+            </a:pPr>
+            <a:r>
+              <a:rPr sz="2000">
+                <a:solidFill>
+                  <a:srgbClr val="5FFA74"/>
+                </a:solidFill>
+                <a:latin typeface="Inter"/>
+              </a:rPr>
+              <a:t>▸  </a:t>
+            </a:r>
+            <a:r>
+              <a:rPr sz="2000" b="1">
+                <a:solidFill>
+                  <a:srgbClr val="FFFFFF"/>
+                </a:solidFill>
+                <a:latin typeface="Inter"/>
+              </a:rPr>
+              <a:t>Cut over is yours</a:t>
+            </a:r>
+            <a:r>
+              <a:rPr sz="2000" b="0">
+                <a:solidFill>
+                  <a:srgbClr val="FFFFFF"/>
+                </a:solidFill>
+                <a:latin typeface="Inter"/>
+              </a:rPr>
+              <a:t>: merge, load, switch</a:t>
+            </a:r>
+          </a:p>
+          <a:p>
+            <a:pPr marL="0" indent="0">
               <a:spcAft>
-                <a:spcPts val="900"/>
+                <a:spcPts val="0"/>
               </a:spcAft>
+              <a:buNone/>
+              <a:spcBef>
+                <a:spcPts val="0"/>
+              </a:spcBef>
             </a:pPr>
             <a:r>
-              <a:rPr sz="1300">
+              <a:rPr sz="2000">
                 <a:solidFill>
                   <a:srgbClr val="5FFA74"/>
                 </a:solidFill>
@@ -42482,86 +42609,16 @@
               <a:t>▸  </a:t>
             </a:r>
             <a:r>
-              <a:rPr sz="1300" b="1">
+              <a:rPr sz="2000" b="1">
                 <a:solidFill>
                   <a:srgbClr val="FFFFFF"/>
                 </a:solidFill>
                 <a:latin typeface="Inter"/>
               </a:rPr>
-              <a:t>Then a pull request</a:t>
-            </a:r>
-            <a:r>
-              <a:rPr sz="1300" b="0">
-                <a:solidFill>
-                  <a:srgbClr val="FFFFFF"/>
-                </a:solidFill>
-                <a:latin typeface="Inter"/>
-              </a:rPr>
-              <a:t>, with a preview URL</a:t>
-            </a:r>
-          </a:p>
-          <a:p>
-            <a:pPr marL="0" indent="0">
-              <a:buNone/>
-              <a:spcAft>
-                <a:spcPts val="900"/>
-              </a:spcAft>
-            </a:pPr>
-            <a:r>
-              <a:rPr sz="1300">
-                <a:solidFill>
-                  <a:srgbClr val="5FFA74"/>
-                </a:solidFill>
-                <a:latin typeface="Inter"/>
-              </a:rPr>
-              <a:t>▸  </a:t>
-            </a:r>
-            <a:r>
-              <a:rPr sz="1300" b="1">
-                <a:solidFill>
-                  <a:srgbClr val="FFFFFF"/>
-                </a:solidFill>
-                <a:latin typeface="Inter"/>
-              </a:rPr>
-              <a:t>Cut over is yours</a:t>
-            </a:r>
-            <a:r>
-              <a:rPr sz="1300" b="0">
-                <a:solidFill>
-                  <a:srgbClr val="FFFFFF"/>
-                </a:solidFill>
-                <a:latin typeface="Inter"/>
-              </a:rPr>
-              <a:t>: merge, load, switch</a:t>
-            </a:r>
-          </a:p>
-          <a:p>
-            <a:pPr marL="0" indent="0">
-              <a:buNone/>
-              <a:spcAft>
-                <a:spcPts val="900"/>
-              </a:spcAft>
-            </a:pPr>
-            <a:r>
-              <a:rPr sz="1300">
-                <a:solidFill>
-                  <a:srgbClr val="5FFA74"/>
-                </a:solidFill>
-                <a:latin typeface="Inter"/>
-              </a:rPr>
-              <a:t>▸  </a:t>
-            </a:r>
-            <a:r>
-              <a:rPr sz="1300" b="1">
-                <a:solidFill>
-                  <a:srgbClr val="FFFFFF"/>
-                </a:solidFill>
-                <a:latin typeface="Inter"/>
-              </a:rPr>
               <a:t>Roll back</a:t>
             </a:r>
             <a:r>
-              <a:rPr sz="1300" b="0">
+              <a:rPr sz="2000" b="0">
                 <a:solidFill>
                   <a:srgbClr val="FFFFFF"/>
                 </a:solidFill>
@@ -42704,7 +42761,7 @@
                 </a:solidFill>
                 <a:latin typeface="Inter"/>
               </a:rPr>
-              <a:t> only makes the agent computer; the agent does the rest, with its own Nevia key</a:t>
+              <a:t> only makes the agent computer; the agent does the rest</a:t>
             </a:r>
           </a:p>
           <a:p>
@@ -42739,7 +42796,25 @@
                 </a:solidFill>
                 <a:latin typeface="Inter"/>
               </a:rPr>
-              <a:t>, one setting; models through the Aiven AI gateway; both drive Nevia with the </a:t>
+              <a:t>, one setting; models through the </a:t>
+            </a:r>
+            <a:r>
+              <a:rPr sz="1200" b="0">
+                <a:solidFill>
+                  <a:srgbClr val="5FFA74"/>
+                </a:solidFill>
+                <a:latin typeface="Geist Mono Medium"/>
+              </a:rPr>
+              <a:t>Aiven AI gateway</a:t>
+            </a:r>
+            <a:r>
+              <a:rPr sz="1200" b="0">
+                <a:solidFill>
+                  <a:srgbClr val="FFFFFF"/>
+                </a:solidFill>
+                <a:latin typeface="Inter"/>
+              </a:rPr>
+              <a:t>; both drive Nevia with the </a:t>
             </a:r>
             <a:r>
               <a:rPr sz="1200" b="0">
@@ -43297,19 +43372,65 @@
             <p:ph type="body" idx="1"/>
           </p:nvPr>
         </p:nvSpPr>
-        <p:spPr/>
-        <p:txBody>
-          <a:bodyPr wrap="square"/>
+        <p:spPr>
+          <a:xfrm>
+            <a:off x="548640" y="1188720"/>
+            <a:ext cx="8055864" cy="3474720"/>
+          </a:xfrm>
+        </p:spPr>
+        <p:txBody>
+          <a:bodyPr wrap="square" anchor="ctr" tIns="0" bIns="0"/>
           <a:lstStyle/>
           <a:p>
             <a:pPr marL="0" indent="0">
+              <a:spcAft>
+                <a:spcPts val="1520"/>
+              </a:spcAft>
               <a:buNone/>
+              <a:spcBef>
+                <a:spcPts val="0"/>
+              </a:spcBef>
+            </a:pPr>
+            <a:r>
+              <a:rPr sz="1900">
+                <a:solidFill>
+                  <a:srgbClr val="5FFA74"/>
+                </a:solidFill>
+                <a:latin typeface="Inter"/>
+              </a:rPr>
+              <a:t>▸  </a:t>
+            </a:r>
+            <a:r>
+              <a:rPr sz="1900" b="1">
+                <a:solidFill>
+                  <a:srgbClr val="FFFFFF"/>
+                </a:solidFill>
+                <a:latin typeface="Inter"/>
+              </a:rPr>
+              <a:t>You get</a:t>
+            </a:r>
+            <a:r>
+              <a:rPr sz="1900" b="0">
+                <a:solidFill>
+                  <a:srgbClr val="FFFFFF"/>
+                </a:solidFill>
+                <a:latin typeface="Inter"/>
+              </a:rPr>
+              <a:t>: your data in PostgreSQL, the SQL that loaded it, and a tested pull request</a:t>
+            </a:r>
+          </a:p>
+          <a:p>
+            <a:pPr marL="0" indent="0">
               <a:spcAft>
-                <a:spcPts val="900"/>
+                <a:spcPts val="1520"/>
               </a:spcAft>
+              <a:buNone/>
+              <a:spcBef>
+                <a:spcPts val="0"/>
+              </a:spcBef>
             </a:pPr>
             <a:r>
-              <a:rPr sz="1300">
+              <a:rPr sz="1900">
                 <a:solidFill>
                   <a:srgbClr val="5FFA74"/>
                 </a:solidFill>
@@ -43318,51 +43439,139 @@
               <a:t>▸  </a:t>
             </a:r>
             <a:r>
-              <a:rPr sz="1300" b="1">
+              <a:rPr sz="1900" b="1">
                 <a:solidFill>
                   <a:srgbClr val="FFFFFF"/>
                 </a:solidFill>
                 <a:latin typeface="Inter"/>
               </a:rPr>
-              <a:t>You get</a:t>
-            </a:r>
-            <a:r>
-              <a:rPr sz="1300" b="0">
+              <a:t>The limit</a:t>
+            </a:r>
+            <a:r>
+              <a:rPr sz="1900" b="0">
                 <a:solidFill>
                   <a:srgbClr val="FFFFFF"/>
                 </a:solidFill>
                 <a:latin typeface="Inter"/>
               </a:rPr>
-              <a:t>: the loaded target, </a:t>
-            </a:r>
-            <a:r>
-              <a:rPr sz="1300" b="0">
+              <a:t>: the tables are worked out from a sample of the data</a:t>
+            </a:r>
+          </a:p>
+          <a:p>
+            <a:pPr marL="0" indent="0">
+              <a:spcAft>
+                <a:spcPts val="1520"/>
+              </a:spcAft>
+              <a:buNone/>
+              <a:spcBef>
+                <a:spcPts val="0"/>
+              </a:spcBef>
+            </a:pPr>
+            <a:r>
+              <a:rPr sz="1900">
                 <a:solidFill>
                   <a:srgbClr val="5FFA74"/>
                 </a:solidFill>
+                <a:latin typeface="Inter"/>
+              </a:rPr>
+              <a:t>▸  </a:t>
+            </a:r>
+            <a:r>
+              <a:rPr sz="1900" b="1">
+                <a:solidFill>
+                  <a:srgbClr val="FFFFFF"/>
+                </a:solidFill>
+                <a:latin typeface="Inter"/>
+              </a:rPr>
+              <a:t>Next</a:t>
+            </a:r>
+            <a:r>
+              <a:rPr sz="1900" b="0">
+                <a:solidFill>
+                  <a:srgbClr val="FFFFFF"/>
+                </a:solidFill>
+                <a:latin typeface="Inter"/>
+              </a:rPr>
+              <a:t>: more apps, and the switch to PostgreSQL as one more step</a:t>
+            </a:r>
+          </a:p>
+          <a:p>
+            <a:pPr marL="0" indent="0">
+              <a:spcAft>
+                <a:spcPts val="1520"/>
+              </a:spcAft>
+              <a:buNone/>
+              <a:spcBef>
+                <a:spcPts val="0"/>
+              </a:spcBef>
+            </a:pPr>
+            <a:r>
+              <a:rPr sz="1900">
+                <a:solidFill>
+                  <a:srgbClr val="5FFA74"/>
+                </a:solidFill>
+                <a:latin typeface="Inter"/>
+              </a:rPr>
+              <a:t>▸  </a:t>
+            </a:r>
+            <a:r>
+              <a:rPr sz="1900" b="1">
+                <a:solidFill>
+                  <a:srgbClr val="FFFFFF"/>
+                </a:solidFill>
+                <a:latin typeface="Inter"/>
+              </a:rPr>
+              <a:t>Try m2p</a:t>
+            </a:r>
+            <a:r>
+              <a:rPr sz="1900" b="0">
+                <a:solidFill>
+                  <a:srgbClr val="FFFFFF"/>
+                </a:solidFill>
+                <a:latin typeface="Inter"/>
+              </a:rPr>
+              <a:t>: </a:t>
+            </a:r>
+            <a:r>
+              <a:rPr sz="1900" b="0">
+                <a:solidFill>
+                  <a:srgbClr val="5FFA74"/>
+                </a:solidFill>
                 <a:latin typeface="Geist Mono Medium"/>
               </a:rPr>
-              <a:t>final.sql</a:t>
-            </a:r>
-            <a:r>
-              <a:rPr sz="1300" b="0">
+              <a:t>agent m2p setup</a:t>
+            </a:r>
+            <a:r>
+              <a:rPr sz="1900" b="0">
                 <a:solidFill>
                   <a:srgbClr val="FFFFFF"/>
                 </a:solidFill>
                 <a:latin typeface="Inter"/>
               </a:rPr>
-              <a:t>, a tested PR</a:t>
+              <a:t>, then </a:t>
+            </a:r>
+            <a:r>
+              <a:rPr sz="1900" b="0">
+                <a:solidFill>
+                  <a:srgbClr val="5FFA74"/>
+                </a:solidFill>
+                <a:latin typeface="Geist Mono Medium"/>
+              </a:rPr>
+              <a:t>agent m2p run</a:t>
             </a:r>
           </a:p>
           <a:p>
             <a:pPr marL="0" indent="0">
+              <a:spcAft>
+                <a:spcPts val="0"/>
+              </a:spcAft>
               <a:buNone/>
-              <a:spcAft>
-                <a:spcPts val="900"/>
-              </a:spcAft>
+              <a:spcBef>
+                <a:spcPts val="0"/>
+              </a:spcBef>
             </a:pPr>
             <a:r>
-              <a:rPr sz="1300">
+              <a:rPr sz="1900">
                 <a:solidFill>
                   <a:srgbClr val="5FFA74"/>
                 </a:solidFill>
@@ -43371,175 +43580,43 @@
               <a:t>▸  </a:t>
             </a:r>
             <a:r>
-              <a:rPr sz="1300" b="1">
+              <a:rPr sz="1900" b="1">
                 <a:solidFill>
                   <a:srgbClr val="FFFFFF"/>
                 </a:solidFill>
                 <a:latin typeface="Inter"/>
               </a:rPr>
-              <a:t>Limits</a:t>
-            </a:r>
-            <a:r>
-              <a:rPr sz="1300" b="0">
+              <a:t>Try acc</a:t>
+            </a:r>
+            <a:r>
+              <a:rPr sz="1900" b="0">
                 <a:solidFill>
                   <a:srgbClr val="FFFFFF"/>
                 </a:solidFill>
                 <a:latin typeface="Inter"/>
               </a:rPr>
-              <a:t>: schemas inferred from samples</a:t>
-            </a:r>
-          </a:p>
-          <a:p>
-            <a:pPr marL="0" indent="0">
-              <a:buNone/>
-              <a:spcAft>
-                <a:spcPts val="900"/>
-              </a:spcAft>
-            </a:pPr>
-            <a:r>
-              <a:rPr sz="1300">
+              <a:t>: </a:t>
+            </a:r>
+            <a:r>
+              <a:rPr sz="1900" b="0">
                 <a:solidFill>
                   <a:srgbClr val="5FFA74"/>
                 </a:solidFill>
-                <a:latin typeface="Inter"/>
-              </a:rPr>
-              <a:t>▸  </a:t>
-            </a:r>
-            <a:r>
-              <a:rPr sz="1300" b="1">
+                <a:latin typeface="Geist Mono Medium"/>
+              </a:rPr>
+              <a:t>agent acc setup</a:t>
+            </a:r>
+            <a:r>
+              <a:rPr sz="1900" b="0">
                 <a:solidFill>
                   <a:srgbClr val="FFFFFF"/>
                 </a:solidFill>
                 <a:latin typeface="Inter"/>
               </a:rPr>
-              <a:t>Next</a:t>
-            </a:r>
-            <a:r>
-              <a:rPr sz="1300" b="0">
-                <a:solidFill>
-                  <a:srgbClr val="FFFFFF"/>
-                </a:solidFill>
-                <a:latin typeface="Inter"/>
-              </a:rPr>
-              <a:t>: more apps, the cut-over as a step</a:t>
-            </a:r>
-          </a:p>
-          <a:p>
-            <a:pPr marL="0" indent="0">
-              <a:buNone/>
-              <a:spcAft>
-                <a:spcPts val="900"/>
-              </a:spcAft>
-            </a:pPr>
-            <a:r>
-              <a:rPr sz="1300">
-                <a:solidFill>
-                  <a:srgbClr val="5FFA74"/>
-                </a:solidFill>
-                <a:latin typeface="Inter"/>
-              </a:rPr>
-              <a:t>▸  </a:t>
-            </a:r>
-            <a:r>
-              <a:rPr sz="1300" b="1">
-                <a:solidFill>
-                  <a:srgbClr val="FFFFFF"/>
-                </a:solidFill>
-                <a:latin typeface="Inter"/>
-              </a:rPr>
-              <a:t>Try m2p</a:t>
-            </a:r>
-            <a:r>
-              <a:rPr sz="1300" b="0">
-                <a:solidFill>
-                  <a:srgbClr val="FFFFFF"/>
-                </a:solidFill>
-                <a:latin typeface="Inter"/>
-              </a:rPr>
-              <a:t>: </a:t>
-            </a:r>
-            <a:r>
-              <a:rPr sz="1300" b="0">
-                <a:solidFill>
-                  <a:srgbClr val="5FFA74"/>
-                </a:solidFill>
-                <a:latin typeface="Geist Mono Medium"/>
-              </a:rPr>
-              <a:t>agent m2p setup</a:t>
-            </a:r>
-            <a:r>
-              <a:rPr sz="1300" b="0">
-                <a:solidFill>
-                  <a:srgbClr val="FFFFFF"/>
-                </a:solidFill>
-                <a:latin typeface="Inter"/>
-              </a:rPr>
               <a:t>, then </a:t>
             </a:r>
             <a:r>
-              <a:rPr sz="1300" b="0">
-                <a:solidFill>
-                  <a:srgbClr val="5FFA74"/>
-                </a:solidFill>
-                <a:latin typeface="Geist Mono Medium"/>
-              </a:rPr>
-              <a:t>agent m2p run</a:t>
-            </a:r>
-          </a:p>
-          <a:p>
-            <a:pPr marL="0" indent="0">
-              <a:buNone/>
-              <a:spcAft>
-                <a:spcPts val="900"/>
-              </a:spcAft>
-            </a:pPr>
-            <a:r>
-              <a:rPr sz="1300">
-                <a:solidFill>
-                  <a:srgbClr val="5FFA74"/>
-                </a:solidFill>
-                <a:latin typeface="Inter"/>
-              </a:rPr>
-              <a:t>▸  </a:t>
-            </a:r>
-            <a:r>
-              <a:rPr sz="1300" b="1">
-                <a:solidFill>
-                  <a:srgbClr val="FFFFFF"/>
-                </a:solidFill>
-                <a:latin typeface="Inter"/>
-              </a:rPr>
-              <a:t>Try acc</a:t>
-            </a:r>
-            <a:r>
-              <a:rPr sz="1300" b="0">
-                <a:solidFill>
-                  <a:srgbClr val="FFFFFF"/>
-                </a:solidFill>
-                <a:latin typeface="Inter"/>
-              </a:rPr>
-              <a:t>: </a:t>
-            </a:r>
-            <a:r>
-              <a:rPr sz="1300" b="0">
-                <a:solidFill>
-                  <a:srgbClr val="5FFA74"/>
-                </a:solidFill>
-                <a:latin typeface="Geist Mono Medium"/>
-              </a:rPr>
-              <a:t>agent acc setup</a:t>
-            </a:r>
-            <a:r>
-              <a:rPr sz="1300" b="0">
-                <a:solidFill>
-                  <a:srgbClr val="FFFFFF"/>
-                </a:solidFill>
-                <a:latin typeface="Inter"/>
-              </a:rPr>
-              <a:t>, then </a:t>
-            </a:r>
-            <a:r>
-              <a:rPr sz="1300" b="0">
+              <a:rPr sz="1900" b="0">
                 <a:solidFill>
                   <a:srgbClr val="5FFA74"/>
                 </a:solidFill>
@@ -43849,7 +43926,7 @@
                           </a:solidFill>
                           <a:latin typeface="Inter"/>
                         </a:rPr>
-                        <a:t>a Linux machine in seconds, with an HTTPS URL; it sleeps when idle, wakes on demand</a:t>
+                        <a:t>a Linux machine in seconds. It sleeps when idle, wakes on demand</a:t>
                       </a:r>
                     </a:p>
                   </a:txBody>
@@ -44160,19 +44237,65 @@
             <p:ph type="body" idx="1"/>
           </p:nvPr>
         </p:nvSpPr>
-        <p:spPr/>
-        <p:txBody>
-          <a:bodyPr wrap="square"/>
+        <p:spPr>
+          <a:xfrm>
+            <a:off x="548640" y="1188720"/>
+            <a:ext cx="8055864" cy="3474720"/>
+          </a:xfrm>
+        </p:spPr>
+        <p:txBody>
+          <a:bodyPr wrap="square" anchor="ctr" tIns="0" bIns="0"/>
           <a:lstStyle/>
           <a:p>
             <a:pPr marL="0" indent="0">
+              <a:spcAft>
+                <a:spcPts val="3839"/>
+              </a:spcAft>
               <a:buNone/>
+              <a:spcBef>
+                <a:spcPts val="0"/>
+              </a:spcBef>
+            </a:pPr>
+            <a:r>
+              <a:rPr sz="2000">
+                <a:solidFill>
+                  <a:srgbClr val="5FFA74"/>
+                </a:solidFill>
+                <a:latin typeface="Inter"/>
+              </a:rPr>
+              <a:t>▸  </a:t>
+            </a:r>
+            <a:r>
+              <a:rPr sz="2000" b="1">
+                <a:solidFill>
+                  <a:srgbClr val="FFFFFF"/>
+                </a:solidFill>
+                <a:latin typeface="Inter"/>
+              </a:rPr>
+              <a:t>Try as often as needed</a:t>
+            </a:r>
+            <a:r>
+              <a:rPr sz="2000" b="0">
+                <a:solidFill>
+                  <a:srgbClr val="FFFFFF"/>
+                </a:solidFill>
+                <a:latin typeface="Inter"/>
+              </a:rPr>
+              <a:t>: each try gets its own copy of the database, deleted after</a:t>
+            </a:r>
+          </a:p>
+          <a:p>
+            <a:pPr marL="0" indent="0">
               <a:spcAft>
-                <a:spcPts val="900"/>
+                <a:spcPts val="3839"/>
               </a:spcAft>
+              <a:buNone/>
+              <a:spcBef>
+                <a:spcPts val="0"/>
+              </a:spcBef>
             </a:pPr>
             <a:r>
-              <a:rPr sz="1300">
+              <a:rPr sz="2000">
                 <a:solidFill>
                   <a:srgbClr val="5FFA74"/>
                 </a:solidFill>
@@ -44181,33 +44304,36 @@
               <a:t>▸  </a:t>
             </a:r>
             <a:r>
-              <a:rPr sz="1300" b="1">
+              <a:rPr sz="2000" b="1">
                 <a:solidFill>
                   <a:srgbClr val="FFFFFF"/>
                 </a:solidFill>
                 <a:latin typeface="Inter"/>
               </a:rPr>
-              <a:t>Throwaway is cheap</a:t>
-            </a:r>
-            <a:r>
-              <a:rPr sz="1300" b="0">
+              <a:t>Test the new app next to the old one</a:t>
+            </a:r>
+            <a:r>
+              <a:rPr sz="2000" b="0">
                 <a:solidFill>
                   <a:srgbClr val="FFFFFF"/>
                 </a:solidFill>
                 <a:latin typeface="Inter"/>
               </a:rPr>
-              <a:t>: a branch per try</a:t>
+              <a:t>: a copy of the running app, on a copy of its data</a:t>
             </a:r>
           </a:p>
           <a:p>
             <a:pPr marL="0" indent="0">
+              <a:spcAft>
+                <a:spcPts val="0"/>
+              </a:spcAft>
               <a:buNone/>
-              <a:spcAft>
-                <a:spcPts val="900"/>
-              </a:spcAft>
+              <a:spcBef>
+                <a:spcPts val="0"/>
+              </a:spcBef>
             </a:pPr>
             <a:r>
-              <a:rPr sz="1300">
+              <a:rPr sz="2000">
                 <a:solidFill>
                   <a:srgbClr val="5FFA74"/>
                 </a:solidFill>
@@ -44216,127 +44342,22 @@
               <a:t>▸  </a:t>
             </a:r>
             <a:r>
-              <a:rPr sz="1300" b="1">
+              <a:rPr sz="2000" b="1">
                 <a:solidFill>
                   <a:srgbClr val="FFFFFF"/>
                 </a:solidFill>
                 <a:latin typeface="Inter"/>
               </a:rPr>
-              <a:t>The real app, beside itself</a:t>
-            </a:r>
-            <a:r>
-              <a:rPr sz="1300" b="0">
+              <a:t>Each agent works on its own</a:t>
+            </a:r>
+            <a:r>
+              <a:rPr sz="2000" b="0">
                 <a:solidFill>
                   <a:srgbClr val="FFFFFF"/>
                 </a:solidFill>
                 <a:latin typeface="Inter"/>
               </a:rPr>
-              <a:t>: a sandbox from a checkpoint</a:t>
-            </a:r>
-          </a:p>
-          <a:p>
-            <a:pPr marL="0" indent="0">
-              <a:buNone/>
-              <a:spcAft>
-                <a:spcPts val="900"/>
-              </a:spcAft>
-            </a:pPr>
-            <a:r>
-              <a:rPr sz="1300">
-                <a:solidFill>
-                  <a:srgbClr val="5FFA74"/>
-                </a:solidFill>
-                <a:latin typeface="Inter"/>
-              </a:rPr>
-              <a:t>▸  </a:t>
-            </a:r>
-            <a:r>
-              <a:rPr sz="1300" b="1">
-                <a:solidFill>
-                  <a:srgbClr val="FFFFFF"/>
-                </a:solidFill>
-                <a:latin typeface="Inter"/>
-              </a:rPr>
-              <a:t>Agents get an API</a:t>
-            </a:r>
-            <a:r>
-              <a:rPr sz="1300" b="0">
-                <a:solidFill>
-                  <a:srgbClr val="FFFFFF"/>
-                </a:solidFill>
-                <a:latin typeface="Inter"/>
-              </a:rPr>
-              <a:t>: their own computer and key</a:t>
-            </a:r>
-          </a:p>
-          <a:p>
-            <a:pPr marL="0" indent="0">
-              <a:buNone/>
-              <a:spcAft>
-                <a:spcPts val="900"/>
-              </a:spcAft>
-            </a:pPr>
-            <a:r>
-              <a:rPr sz="1300">
-                <a:solidFill>
-                  <a:srgbClr val="5FFA74"/>
-                </a:solidFill>
-                <a:latin typeface="Inter"/>
-              </a:rPr>
-              <a:t>▸  </a:t>
-            </a:r>
-            <a:r>
-              <a:rPr sz="1300" b="1">
-                <a:solidFill>
-                  <a:srgbClr val="FFFFFF"/>
-                </a:solidFill>
-                <a:latin typeface="Inter"/>
-              </a:rPr>
-              <a:t>Secrets stay out of reach</a:t>
-            </a:r>
-            <a:r>
-              <a:rPr sz="1300" b="0">
-                <a:solidFill>
-                  <a:srgbClr val="FFFFFF"/>
-                </a:solidFill>
-                <a:latin typeface="Inter"/>
-              </a:rPr>
-              <a:t>: never in prompts or files</a:t>
-            </a:r>
-          </a:p>
-          <a:p>
-            <a:pPr marL="0" indent="0">
-              <a:buNone/>
-              <a:spcAft>
-                <a:spcPts val="900"/>
-              </a:spcAft>
-            </a:pPr>
-            <a:r>
-              <a:rPr sz="1300">
-                <a:solidFill>
-                  <a:srgbClr val="5FFA74"/>
-                </a:solidFill>
-                <a:latin typeface="Inter"/>
-              </a:rPr>
-              <a:t>▸  </a:t>
-            </a:r>
-            <a:r>
-              <a:rPr sz="1300" b="1">
-                <a:solidFill>
-                  <a:srgbClr val="FFFFFF"/>
-                </a:solidFill>
-                <a:latin typeface="Inter"/>
-              </a:rPr>
-              <a:t>You pay for what runs</a:t>
-            </a:r>
-            <a:r>
-              <a:rPr sz="1300" b="0">
-                <a:solidFill>
-                  <a:srgbClr val="FFFFFF"/>
-                </a:solidFill>
-                <a:latin typeface="Inter"/>
-              </a:rPr>
-              <a:t>: idle computers sleep</a:t>
+              <a:t>: its own computer</a:t>
             </a:r>
           </a:p>
         </p:txBody>
@@ -44464,7 +44485,7 @@
                 </a:solidFill>
                 <a:latin typeface="Inter"/>
               </a:rPr>
-              <a:t>m2p</a:t>
+              <a:t>mongo2pg</a:t>
             </a:r>
             <a:r>
               <a:rPr sz="1050" b="0">
@@ -44473,7 +44494,7 @@
                 </a:solidFill>
                 <a:latin typeface="Inter"/>
               </a:rPr>
-              <a:t>, Mongo to Postgres: the agent that migrates the data</a:t>
+              <a:t> assesses MongoDB first: both agents start from its analysis</a:t>
             </a:r>
           </a:p>
           <a:p>
@@ -44499,7 +44520,7 @@
                 </a:solidFill>
                 <a:latin typeface="Inter"/>
               </a:rPr>
-              <a:t>acc</a:t>
+              <a:t>m2p</a:t>
             </a:r>
             <a:r>
               <a:rPr sz="1050" b="0">
@@ -44508,7 +44529,7 @@
                 </a:solidFill>
                 <a:latin typeface="Inter"/>
               </a:rPr>
-              <a:t>, application code changer: the agent that changes the app's code</a:t>
+              <a:t>, Mongo to Postgres: the agent that migrates the data</a:t>
             </a:r>
           </a:p>
           <a:p>
@@ -44534,7 +44555,7 @@
                 </a:solidFill>
                 <a:latin typeface="Inter"/>
               </a:rPr>
-              <a:t>mongo2pg</a:t>
+              <a:t>acc</a:t>
             </a:r>
             <a:r>
               <a:rPr sz="1050" b="0">
@@ -44543,7 +44564,7 @@
                 </a:solidFill>
                 <a:latin typeface="Inter"/>
               </a:rPr>
-              <a:t> assesses MongoDB first: both agents start from its analysis</a:t>
+              <a:t>, Application Code Changer: the agent that changes the app's code</a:t>
             </a:r>
           </a:p>
           <a:p>
@@ -45455,19 +45476,65 @@
             <p:ph type="body" idx="1"/>
           </p:nvPr>
         </p:nvSpPr>
-        <p:spPr/>
-        <p:txBody>
-          <a:bodyPr wrap="square"/>
+        <p:spPr>
+          <a:xfrm>
+            <a:off x="548640" y="1188720"/>
+            <a:ext cx="8055864" cy="3474720"/>
+          </a:xfrm>
+        </p:spPr>
+        <p:txBody>
+          <a:bodyPr wrap="square" anchor="ctr" tIns="0" bIns="0"/>
           <a:lstStyle/>
           <a:p>
             <a:pPr marL="0" indent="0">
+              <a:spcAft>
+                <a:spcPts val="2559"/>
+              </a:spcAft>
               <a:buNone/>
+              <a:spcBef>
+                <a:spcPts val="0"/>
+              </a:spcBef>
+            </a:pPr>
+            <a:r>
+              <a:rPr sz="2000">
+                <a:solidFill>
+                  <a:srgbClr val="5FFA74"/>
+                </a:solidFill>
+                <a:latin typeface="Inter"/>
+              </a:rPr>
+              <a:t>▸  </a:t>
+            </a:r>
+            <a:r>
+              <a:rPr sz="2000" b="1">
+                <a:solidFill>
+                  <a:srgbClr val="FFFFFF"/>
+                </a:solidFill>
+                <a:latin typeface="Inter"/>
+              </a:rPr>
+              <a:t>m2p</a:t>
+            </a:r>
+            <a:r>
+              <a:rPr sz="2000" b="0">
+                <a:solidFill>
+                  <a:srgbClr val="FFFFFF"/>
+                </a:solidFill>
+                <a:latin typeface="Inter"/>
+              </a:rPr>
+              <a:t>: an AI agent that migrates the data</a:t>
+            </a:r>
+          </a:p>
+          <a:p>
+            <a:pPr marL="0" indent="0">
               <a:spcAft>
-                <a:spcPts val="900"/>
+                <a:spcPts val="2559"/>
               </a:spcAft>
+              <a:buNone/>
+              <a:spcBef>
+                <a:spcPts val="0"/>
+              </a:spcBef>
             </a:pPr>
             <a:r>
-              <a:rPr sz="1300">
+              <a:rPr sz="2000">
                 <a:solidFill>
                   <a:srgbClr val="5FFA74"/>
                 </a:solidFill>
@@ -45476,33 +45543,74 @@
               <a:t>▸  </a:t>
             </a:r>
             <a:r>
-              <a:rPr sz="1300" b="1">
+              <a:rPr sz="2000" b="1">
                 <a:solidFill>
                   <a:srgbClr val="FFFFFF"/>
                 </a:solidFill>
                 <a:latin typeface="Inter"/>
               </a:rPr>
-              <a:t>m2p, Mongo to Postgres</a:t>
-            </a:r>
-            <a:r>
-              <a:rPr sz="1300" b="0">
+              <a:t>One try, one branch</a:t>
+            </a:r>
+            <a:r>
+              <a:rPr sz="2000" b="0">
                 <a:solidFill>
                   <a:srgbClr val="FFFFFF"/>
                 </a:solidFill>
                 <a:latin typeface="Inter"/>
               </a:rPr>
-              <a:t>: an AI agent that migrates the data</a:t>
+              <a:t> of the target Postgres</a:t>
             </a:r>
           </a:p>
           <a:p>
             <a:pPr marL="0" indent="0">
+              <a:spcAft>
+                <a:spcPts val="2559"/>
+              </a:spcAft>
               <a:buNone/>
+              <a:spcBef>
+                <a:spcPts val="0"/>
+              </a:spcBef>
+            </a:pPr>
+            <a:r>
+              <a:rPr sz="2000">
+                <a:solidFill>
+                  <a:srgbClr val="5FFA74"/>
+                </a:solidFill>
+                <a:latin typeface="Inter"/>
+              </a:rPr>
+              <a:t>▸  </a:t>
+            </a:r>
+            <a:r>
+              <a:rPr sz="2000" b="1">
+                <a:solidFill>
+                  <a:srgbClr val="FFFFFF"/>
+                </a:solidFill>
+                <a:latin typeface="Inter"/>
+              </a:rPr>
+              <a:t>Checked by mongo2pg</a:t>
+            </a:r>
+            <a:r>
+              <a:rPr sz="2000" b="0">
+                <a:solidFill>
+                  <a:srgbClr val="FFFFFF"/>
+                </a:solidFill>
+                <a:latin typeface="Inter"/>
+              </a:rPr>
+              <a:t>: row counts and checksums</a:t>
+            </a:r>
+          </a:p>
+          <a:p>
+            <a:pPr marL="0" indent="0">
               <a:spcAft>
-                <a:spcPts val="900"/>
+                <a:spcPts val="2559"/>
               </a:spcAft>
+              <a:buNone/>
+              <a:spcBef>
+                <a:spcPts val="0"/>
+              </a:spcBef>
             </a:pPr>
             <a:r>
-              <a:rPr sz="1300">
+              <a:rPr sz="2000">
                 <a:solidFill>
                   <a:srgbClr val="5FFA74"/>
                 </a:solidFill>
@@ -45511,33 +45619,36 @@
               <a:t>▸  </a:t>
             </a:r>
             <a:r>
-              <a:rPr sz="1300" b="1">
+              <a:rPr sz="2000" b="1">
                 <a:solidFill>
                   <a:srgbClr val="FFFFFF"/>
                 </a:solidFill>
                 <a:latin typeface="Inter"/>
               </a:rPr>
-              <a:t>One try, one branch</a:t>
-            </a:r>
-            <a:r>
-              <a:rPr sz="1300" b="0">
+              <a:t>Fix the data first</a:t>
+            </a:r>
+            <a:r>
+              <a:rPr sz="2000" b="0">
                 <a:solidFill>
                   <a:srgbClr val="FFFFFF"/>
                 </a:solidFill>
                 <a:latin typeface="Inter"/>
               </a:rPr>
-              <a:t> of the target Postgres</a:t>
+              <a:t>, the model only if needed</a:t>
             </a:r>
           </a:p>
           <a:p>
             <a:pPr marL="0" indent="0">
+              <a:spcAft>
+                <a:spcPts val="0"/>
+              </a:spcAft>
               <a:buNone/>
-              <a:spcAft>
-                <a:spcPts val="900"/>
-              </a:spcAft>
+              <a:spcBef>
+                <a:spcPts val="0"/>
+              </a:spcBef>
             </a:pPr>
             <a:r>
-              <a:rPr sz="1300">
+              <a:rPr sz="2000">
                 <a:solidFill>
                   <a:srgbClr val="5FFA74"/>
                 </a:solidFill>
@@ -45546,95 +45657,25 @@
               <a:t>▸  </a:t>
             </a:r>
             <a:r>
-              <a:rPr sz="1300" b="1">
+              <a:rPr sz="2000" b="1">
                 <a:solidFill>
                   <a:srgbClr val="FFFFFF"/>
                 </a:solidFill>
                 <a:latin typeface="Inter"/>
               </a:rPr>
-              <a:t>Checked by mongo2pg</a:t>
-            </a:r>
-            <a:r>
-              <a:rPr sz="1300" b="0">
+              <a:t>The result</a:t>
+            </a:r>
+            <a:r>
+              <a:rPr sz="2000" b="0">
                 <a:solidFill>
                   <a:srgbClr val="FFFFFF"/>
                 </a:solidFill>
                 <a:latin typeface="Inter"/>
               </a:rPr>
-              <a:t>: row counts and checksums</a:t>
-            </a:r>
-          </a:p>
-          <a:p>
-            <a:pPr marL="0" indent="0">
-              <a:buNone/>
-              <a:spcAft>
-                <a:spcPts val="900"/>
-              </a:spcAft>
-            </a:pPr>
-            <a:r>
-              <a:rPr sz="1300">
-                <a:solidFill>
-                  <a:srgbClr val="5FFA74"/>
-                </a:solidFill>
-                <a:latin typeface="Inter"/>
-              </a:rPr>
-              <a:t>▸  </a:t>
-            </a:r>
-            <a:r>
-              <a:rPr sz="1300" b="1">
-                <a:solidFill>
-                  <a:srgbClr val="FFFFFF"/>
-                </a:solidFill>
-                <a:latin typeface="Inter"/>
-              </a:rPr>
-              <a:t>Fix the data first</a:t>
-            </a:r>
-            <a:r>
-              <a:rPr sz="1300" b="0">
-                <a:solidFill>
-                  <a:srgbClr val="FFFFFF"/>
-                </a:solidFill>
-                <a:latin typeface="Inter"/>
-              </a:rPr>
-              <a:t>, the model only if needed</a:t>
-            </a:r>
-          </a:p>
-          <a:p>
-            <a:pPr marL="0" indent="0">
-              <a:buNone/>
-              <a:spcAft>
-                <a:spcPts val="900"/>
-              </a:spcAft>
-            </a:pPr>
-            <a:r>
-              <a:rPr sz="1300">
-                <a:solidFill>
-                  <a:srgbClr val="5FFA74"/>
-                </a:solidFill>
-                <a:latin typeface="Inter"/>
-              </a:rPr>
-              <a:t>▸  </a:t>
-            </a:r>
-            <a:r>
-              <a:rPr sz="1300" b="1">
-                <a:solidFill>
-                  <a:srgbClr val="FFFFFF"/>
-                </a:solidFill>
-                <a:latin typeface="Inter"/>
-              </a:rPr>
-              <a:t>The result</a:t>
-            </a:r>
-            <a:r>
-              <a:rPr sz="1300" b="0">
-                <a:solidFill>
-                  <a:srgbClr val="FFFFFF"/>
-                </a:solidFill>
-                <a:latin typeface="Inter"/>
-              </a:rPr>
               <a:t>: the target loaded, and </a:t>
             </a:r>
             <a:r>
-              <a:rPr sz="1300" b="0">
+              <a:rPr sz="2000" b="0">
                 <a:solidFill>
                   <a:srgbClr val="5FFA74"/>
                 </a:solidFill>
@@ -45703,7 +45744,7 @@
           <a:lstStyle/>
           <a:p>
             <a:r>
-              <a:t>2. Move the data: m2p</a:t>
+              <a:t>2. Move the data: Mongo to Postgres =&gt; m2p</a:t>
             </a:r>
           </a:p>
         </p:txBody>
@@ -45797,7 +45838,7 @@
         </p:nvSpPr>
         <p:spPr>
           <a:xfrm>
-            <a:off x="6517843" y="429768"/>
+            <a:off x="6217919" y="425196"/>
             <a:ext cx="64008" cy="64008"/>
           </a:xfrm>
           <a:prstGeom prst="ellipse">
@@ -45841,8 +45882,8 @@
         </p:nvSpPr>
         <p:spPr>
           <a:xfrm>
-            <a:off x="6590995" y="384048"/>
-            <a:ext cx="570585" cy="146304"/>
+            <a:off x="6327647" y="384048"/>
+            <a:ext cx="548640" cy="146304"/>
           </a:xfrm>
           <a:prstGeom prst="rect">
             <a:avLst/>
@@ -45850,8 +45891,8 @@
           <a:noFill/>
         </p:spPr>
         <p:txBody>
-          <a:bodyPr wrap="square" lIns="45720" rIns="45720" tIns="18288" bIns="18288" anchor="t">
-            <a:spAutoFit/>
+          <a:bodyPr wrap="none" lIns="0" rIns="0" tIns="0" bIns="0" anchor="ctr">
+            <a:noAutofit/>
           </a:bodyPr>
           <a:lstStyle/>
           <a:p>
@@ -45880,7 +45921,7 @@
         </p:nvSpPr>
         <p:spPr>
           <a:xfrm>
-            <a:off x="7161580" y="429768"/>
+            <a:off x="6986015" y="425196"/>
             <a:ext cx="64008" cy="64008"/>
           </a:xfrm>
           <a:prstGeom prst="ellipse">
@@ -45924,8 +45965,8 @@
         </p:nvSpPr>
         <p:spPr>
           <a:xfrm>
-            <a:off x="7234732" y="384048"/>
-            <a:ext cx="378561" cy="146304"/>
+            <a:off x="7095743" y="384048"/>
+            <a:ext cx="320040" cy="146304"/>
           </a:xfrm>
           <a:prstGeom prst="rect">
             <a:avLst/>
@@ -45933,8 +45974,8 @@
           <a:noFill/>
         </p:spPr>
         <p:txBody>
-          <a:bodyPr wrap="square" lIns="45720" rIns="45720" tIns="18288" bIns="18288" anchor="t">
-            <a:spAutoFit/>
+          <a:bodyPr wrap="none" lIns="0" rIns="0" tIns="0" bIns="0" anchor="ctr">
+            <a:noAutofit/>
           </a:bodyPr>
           <a:lstStyle/>
           <a:p>
@@ -45963,7 +46004,7 @@
         </p:nvSpPr>
         <p:spPr>
           <a:xfrm>
-            <a:off x="7613294" y="429768"/>
+            <a:off x="7525511" y="425196"/>
             <a:ext cx="64008" cy="64008"/>
           </a:xfrm>
           <a:prstGeom prst="ellipse">
@@ -46007,8 +46048,8 @@
         </p:nvSpPr>
         <p:spPr>
           <a:xfrm>
-            <a:off x="7686446" y="384048"/>
-            <a:ext cx="263347" cy="146304"/>
+            <a:off x="7635240" y="384048"/>
+            <a:ext cx="182880" cy="146304"/>
           </a:xfrm>
           <a:prstGeom prst="rect">
             <a:avLst/>
@@ -46016,8 +46057,8 @@
           <a:noFill/>
         </p:spPr>
         <p:txBody>
-          <a:bodyPr wrap="square" lIns="45720" rIns="45720" tIns="18288" bIns="18288" anchor="t">
-            <a:spAutoFit/>
+          <a:bodyPr wrap="none" lIns="0" rIns="0" tIns="0" bIns="0" anchor="ctr">
+            <a:noAutofit/>
           </a:bodyPr>
           <a:lstStyle/>
           <a:p>
@@ -46046,7 +46087,7 @@
         </p:nvSpPr>
         <p:spPr>
           <a:xfrm>
-            <a:off x="7949793" y="429768"/>
+            <a:off x="7927847" y="425196"/>
             <a:ext cx="64008" cy="64008"/>
           </a:xfrm>
           <a:prstGeom prst="ellipse">
@@ -46090,8 +46131,8 @@
         </p:nvSpPr>
         <p:spPr>
           <a:xfrm>
-            <a:off x="8022945" y="384048"/>
-            <a:ext cx="186537" cy="146304"/>
+            <a:off x="8037575" y="384048"/>
+            <a:ext cx="91440" cy="146304"/>
           </a:xfrm>
           <a:prstGeom prst="rect">
             <a:avLst/>
@@ -46099,8 +46140,8 @@
           <a:noFill/>
         </p:spPr>
         <p:txBody>
-          <a:bodyPr wrap="square" lIns="45720" rIns="45720" tIns="18288" bIns="18288" anchor="t">
-            <a:spAutoFit/>
+          <a:bodyPr wrap="none" lIns="0" rIns="0" tIns="0" bIns="0" anchor="ctr">
+            <a:noAutofit/>
           </a:bodyPr>
           <a:lstStyle/>
           <a:p>
@@ -46129,7 +46170,7 @@
         </p:nvSpPr>
         <p:spPr>
           <a:xfrm>
-            <a:off x="8209483" y="429768"/>
+            <a:off x="8238743" y="425196"/>
             <a:ext cx="64008" cy="64008"/>
           </a:xfrm>
           <a:prstGeom prst="ellipse">
@@ -46173,8 +46214,8 @@
         </p:nvSpPr>
         <p:spPr>
           <a:xfrm>
-            <a:off x="8282635" y="384048"/>
-            <a:ext cx="340156" cy="146304"/>
+            <a:off x="8348471" y="384048"/>
+            <a:ext cx="274320" cy="146304"/>
           </a:xfrm>
           <a:prstGeom prst="rect">
             <a:avLst/>
@@ -46182,8 +46223,8 @@
           <a:noFill/>
         </p:spPr>
         <p:txBody>
-          <a:bodyPr wrap="square" lIns="45720" rIns="45720" tIns="18288" bIns="18288" anchor="t">
-            <a:spAutoFit/>
+          <a:bodyPr wrap="none" lIns="0" rIns="0" tIns="0" bIns="0" anchor="ctr">
+            <a:noAutofit/>
           </a:bodyPr>
           <a:lstStyle/>
           <a:p>
@@ -47493,7 +47534,7 @@
         </p:nvSpPr>
         <p:spPr>
           <a:xfrm>
-            <a:off x="6517843" y="429768"/>
+            <a:off x="6217919" y="425196"/>
             <a:ext cx="64008" cy="64008"/>
           </a:xfrm>
           <a:prstGeom prst="ellipse">
@@ -47537,8 +47578,8 @@
         </p:nvSpPr>
         <p:spPr>
           <a:xfrm>
-            <a:off x="6590995" y="384048"/>
-            <a:ext cx="570585" cy="146304"/>
+            <a:off x="6327647" y="384048"/>
+            <a:ext cx="548640" cy="146304"/>
           </a:xfrm>
           <a:prstGeom prst="rect">
             <a:avLst/>
@@ -47546,8 +47587,8 @@
           <a:noFill/>
         </p:spPr>
         <p:txBody>
-          <a:bodyPr wrap="square" lIns="45720" rIns="45720" tIns="18288" bIns="18288" anchor="t">
-            <a:spAutoFit/>
+          <a:bodyPr wrap="none" lIns="0" rIns="0" tIns="0" bIns="0" anchor="ctr">
+            <a:noAutofit/>
           </a:bodyPr>
           <a:lstStyle/>
           <a:p>
@@ -47576,7 +47617,7 @@
         </p:nvSpPr>
         <p:spPr>
           <a:xfrm>
-            <a:off x="7161580" y="429768"/>
+            <a:off x="6986015" y="425196"/>
             <a:ext cx="64008" cy="64008"/>
           </a:xfrm>
           <a:prstGeom prst="ellipse">
@@ -47620,8 +47661,8 @@
         </p:nvSpPr>
         <p:spPr>
           <a:xfrm>
-            <a:off x="7234732" y="384048"/>
-            <a:ext cx="378561" cy="146304"/>
+            <a:off x="7095743" y="384048"/>
+            <a:ext cx="320040" cy="146304"/>
           </a:xfrm>
           <a:prstGeom prst="rect">
             <a:avLst/>
@@ -47629,8 +47670,8 @@
           <a:noFill/>
         </p:spPr>
         <p:txBody>
-          <a:bodyPr wrap="square" lIns="45720" rIns="45720" tIns="18288" bIns="18288" anchor="t">
-            <a:spAutoFit/>
+          <a:bodyPr wrap="none" lIns="0" rIns="0" tIns="0" bIns="0" anchor="ctr">
+            <a:noAutofit/>
           </a:bodyPr>
           <a:lstStyle/>
           <a:p>
@@ -47659,7 +47700,7 @@
         </p:nvSpPr>
         <p:spPr>
           <a:xfrm>
-            <a:off x="7613294" y="429768"/>
+            <a:off x="7525511" y="425196"/>
             <a:ext cx="64008" cy="64008"/>
           </a:xfrm>
           <a:prstGeom prst="ellipse">
@@ -47703,8 +47744,8 @@
         </p:nvSpPr>
         <p:spPr>
           <a:xfrm>
-            <a:off x="7686446" y="384048"/>
-            <a:ext cx="263347" cy="146304"/>
+            <a:off x="7635240" y="384048"/>
+            <a:ext cx="182880" cy="146304"/>
           </a:xfrm>
           <a:prstGeom prst="rect">
             <a:avLst/>
@@ -47712,8 +47753,8 @@
           <a:noFill/>
         </p:spPr>
         <p:txBody>
-          <a:bodyPr wrap="square" lIns="45720" rIns="45720" tIns="18288" bIns="18288" anchor="t">
-            <a:spAutoFit/>
+          <a:bodyPr wrap="none" lIns="0" rIns="0" tIns="0" bIns="0" anchor="ctr">
+            <a:noAutofit/>
           </a:bodyPr>
           <a:lstStyle/>
           <a:p>
@@ -47742,7 +47783,7 @@
         </p:nvSpPr>
         <p:spPr>
           <a:xfrm>
-            <a:off x="7949793" y="429768"/>
+            <a:off x="7927847" y="425196"/>
             <a:ext cx="64008" cy="64008"/>
           </a:xfrm>
           <a:prstGeom prst="ellipse">
@@ -47786,8 +47827,8 @@
         </p:nvSpPr>
         <p:spPr>
           <a:xfrm>
-            <a:off x="8022945" y="384048"/>
-            <a:ext cx="186537" cy="146304"/>
+            <a:off x="8037575" y="384048"/>
+            <a:ext cx="91440" cy="146304"/>
           </a:xfrm>
           <a:prstGeom prst="rect">
             <a:avLst/>
@@ -47795,8 +47836,8 @@
           <a:noFill/>
         </p:spPr>
         <p:txBody>
-          <a:bodyPr wrap="square" lIns="45720" rIns="45720" tIns="18288" bIns="18288" anchor="t">
-            <a:spAutoFit/>
+          <a:bodyPr wrap="none" lIns="0" rIns="0" tIns="0" bIns="0" anchor="ctr">
+            <a:noAutofit/>
           </a:bodyPr>
           <a:lstStyle/>
           <a:p>
@@ -47825,7 +47866,7 @@
         </p:nvSpPr>
         <p:spPr>
           <a:xfrm>
-            <a:off x="8209483" y="429768"/>
+            <a:off x="8238743" y="425196"/>
             <a:ext cx="64008" cy="64008"/>
           </a:xfrm>
           <a:prstGeom prst="ellipse">
@@ -47869,8 +47910,8 @@
         </p:nvSpPr>
         <p:spPr>
           <a:xfrm>
-            <a:off x="8282635" y="384048"/>
-            <a:ext cx="340156" cy="146304"/>
+            <a:off x="8348471" y="384048"/>
+            <a:ext cx="274320" cy="146304"/>
           </a:xfrm>
           <a:prstGeom prst="rect">
             <a:avLst/>
@@ -47878,8 +47919,8 @@
           <a:noFill/>
         </p:spPr>
         <p:txBody>
-          <a:bodyPr wrap="square" lIns="45720" rIns="45720" tIns="18288" bIns="18288" anchor="t">
-            <a:spAutoFit/>
+          <a:bodyPr wrap="none" lIns="0" rIns="0" tIns="0" bIns="0" anchor="ctr">
+            <a:noAutofit/>
           </a:bodyPr>
           <a:lstStyle/>
           <a:p>
@@ -49629,7 +49670,7 @@
         </p:nvSpPr>
         <p:spPr>
           <a:xfrm>
-            <a:off x="6517843" y="429768"/>
+            <a:off x="6217919" y="425196"/>
             <a:ext cx="64008" cy="64008"/>
           </a:xfrm>
           <a:prstGeom prst="ellipse">
@@ -49673,8 +49714,8 @@
         </p:nvSpPr>
         <p:spPr>
           <a:xfrm>
-            <a:off x="6590995" y="384048"/>
-            <a:ext cx="570585" cy="146304"/>
+            <a:off x="6327647" y="384048"/>
+            <a:ext cx="548640" cy="146304"/>
           </a:xfrm>
           <a:prstGeom prst="rect">
             <a:avLst/>
@@ -49682,8 +49723,8 @@
           <a:noFill/>
         </p:spPr>
         <p:txBody>
-          <a:bodyPr wrap="square" lIns="45720" rIns="45720" tIns="18288" bIns="18288" anchor="t">
-            <a:spAutoFit/>
+          <a:bodyPr wrap="none" lIns="0" rIns="0" tIns="0" bIns="0" anchor="ctr">
+            <a:noAutofit/>
           </a:bodyPr>
           <a:lstStyle/>
           <a:p>
@@ -49712,7 +49753,7 @@
         </p:nvSpPr>
         <p:spPr>
           <a:xfrm>
-            <a:off x="7161580" y="429768"/>
+            <a:off x="6986015" y="425196"/>
             <a:ext cx="64008" cy="64008"/>
           </a:xfrm>
           <a:prstGeom prst="ellipse">
@@ -49756,8 +49797,8 @@
         </p:nvSpPr>
         <p:spPr>
           <a:xfrm>
-            <a:off x="7234732" y="384048"/>
-            <a:ext cx="378561" cy="146304"/>
+            <a:off x="7095743" y="384048"/>
+            <a:ext cx="320040" cy="146304"/>
           </a:xfrm>
           <a:prstGeom prst="rect">
             <a:avLst/>
@@ -49765,8 +49806,8 @@
           <a:noFill/>
         </p:spPr>
         <p:txBody>
-          <a:bodyPr wrap="square" lIns="45720" rIns="45720" tIns="18288" bIns="18288" anchor="t">
-            <a:spAutoFit/>
+          <a:bodyPr wrap="none" lIns="0" rIns="0" tIns="0" bIns="0" anchor="ctr">
+            <a:noAutofit/>
           </a:bodyPr>
           <a:lstStyle/>
           <a:p>
@@ -49795,7 +49836,7 @@
         </p:nvSpPr>
         <p:spPr>
           <a:xfrm>
-            <a:off x="7613294" y="429768"/>
+            <a:off x="7525511" y="425196"/>
             <a:ext cx="64008" cy="64008"/>
           </a:xfrm>
           <a:prstGeom prst="ellipse">
@@ -49839,8 +49880,8 @@
         </p:nvSpPr>
         <p:spPr>
           <a:xfrm>
-            <a:off x="7686446" y="384048"/>
-            <a:ext cx="263347" cy="146304"/>
+            <a:off x="7635240" y="384048"/>
+            <a:ext cx="182880" cy="146304"/>
           </a:xfrm>
           <a:prstGeom prst="rect">
             <a:avLst/>
@@ -49848,8 +49889,8 @@
           <a:noFill/>
         </p:spPr>
         <p:txBody>
-          <a:bodyPr wrap="square" lIns="45720" rIns="45720" tIns="18288" bIns="18288" anchor="t">
-            <a:spAutoFit/>
+          <a:bodyPr wrap="none" lIns="0" rIns="0" tIns="0" bIns="0" anchor="ctr">
+            <a:noAutofit/>
           </a:bodyPr>
           <a:lstStyle/>
           <a:p>
@@ -49878,7 +49919,7 @@
         </p:nvSpPr>
         <p:spPr>
           <a:xfrm>
-            <a:off x="7949793" y="429768"/>
+            <a:off x="7927847" y="425196"/>
             <a:ext cx="64008" cy="64008"/>
           </a:xfrm>
           <a:prstGeom prst="ellipse">
@@ -49922,8 +49963,8 @@
         </p:nvSpPr>
         <p:spPr>
           <a:xfrm>
-            <a:off x="8022945" y="384048"/>
-            <a:ext cx="186537" cy="146304"/>
+            <a:off x="8037575" y="384048"/>
+            <a:ext cx="91440" cy="146304"/>
           </a:xfrm>
           <a:prstGeom prst="rect">
             <a:avLst/>
@@ -49931,8 +49972,8 @@
           <a:noFill/>
         </p:spPr>
         <p:txBody>
-          <a:bodyPr wrap="square" lIns="45720" rIns="45720" tIns="18288" bIns="18288" anchor="t">
-            <a:spAutoFit/>
+          <a:bodyPr wrap="none" lIns="0" rIns="0" tIns="0" bIns="0" anchor="ctr">
+            <a:noAutofit/>
           </a:bodyPr>
           <a:lstStyle/>
           <a:p>
@@ -49961,7 +50002,7 @@
         </p:nvSpPr>
         <p:spPr>
           <a:xfrm>
-            <a:off x="8209483" y="429768"/>
+            <a:off x="8238743" y="425196"/>
             <a:ext cx="64008" cy="64008"/>
           </a:xfrm>
           <a:prstGeom prst="ellipse">
@@ -50005,8 +50046,8 @@
         </p:nvSpPr>
         <p:spPr>
           <a:xfrm>
-            <a:off x="8282635" y="384048"/>
-            <a:ext cx="340156" cy="146304"/>
+            <a:off x="8348471" y="384048"/>
+            <a:ext cx="274320" cy="146304"/>
           </a:xfrm>
           <a:prstGeom prst="rect">
             <a:avLst/>
@@ -50014,8 +50055,8 @@
           <a:noFill/>
         </p:spPr>
         <p:txBody>
-          <a:bodyPr wrap="square" lIns="45720" rIns="45720" tIns="18288" bIns="18288" anchor="t">
-            <a:spAutoFit/>
+          <a:bodyPr wrap="none" lIns="0" rIns="0" tIns="0" bIns="0" anchor="ctr">
+            <a:noAutofit/>
           </a:bodyPr>
           <a:lstStyle/>
           <a:p>
